--- a/resources/GettingStartedWithDevStart/FlowchartR.pptx
+++ b/resources/GettingStartedWithDevStart/FlowchartR.pptx
@@ -115,13 +115,69 @@
 <file path=ppt/revisionInfo.xml><?xml version="1.0" encoding="utf-8"?>
 <p1510:revInfo xmlns:a="http://schemas.openxmlformats.org/drawingml/2006/main" xmlns:r="http://schemas.openxmlformats.org/officeDocument/2006/relationships" xmlns:p1510="http://schemas.microsoft.com/office/powerpoint/2015/10/main">
   <p1510:revLst>
-    <p1510:client id="{DFF45E3B-A62A-4CBF-971A-719412A1D47F}" v="41" dt="2025-08-30T21:36:14.512"/>
+    <p1510:client id="{06CA008E-6957-4938-826F-523EFD017909}" v="2" dt="2025-11-06T11:13:52.731"/>
   </p1510:revLst>
 </p1510:revInfo>
 </file>
 
 <file path=ppt/changesInfos/changesInfo1.xml><?xml version="1.0" encoding="utf-8"?>
 <pc:chgInfo xmlns:a="http://schemas.openxmlformats.org/drawingml/2006/main" xmlns:r="http://schemas.openxmlformats.org/officeDocument/2006/relationships" xmlns:ac="http://schemas.microsoft.com/office/drawing/2013/main/command" xmlns:pc="http://schemas.microsoft.com/office/powerpoint/2013/main/command">
+  <pc:docChgLst>
+    <pc:chgData name="Tommaso Ghilardi (Staff)" userId="b9591c49-3913-47aa-a516-44e0ea4248a4" providerId="ADAL" clId="{DC36FB0E-DC38-4EEF-9931-E787A9AA7CB8}"/>
+    <pc:docChg chg="custSel modSld">
+      <pc:chgData name="Tommaso Ghilardi (Staff)" userId="b9591c49-3913-47aa-a516-44e0ea4248a4" providerId="ADAL" clId="{DC36FB0E-DC38-4EEF-9931-E787A9AA7CB8}" dt="2025-11-06T11:14:13.181" v="23" actId="14100"/>
+      <pc:docMkLst>
+        <pc:docMk/>
+      </pc:docMkLst>
+      <pc:sldChg chg="addSp delSp modSp mod">
+        <pc:chgData name="Tommaso Ghilardi (Staff)" userId="b9591c49-3913-47aa-a516-44e0ea4248a4" providerId="ADAL" clId="{DC36FB0E-DC38-4EEF-9931-E787A9AA7CB8}" dt="2025-11-06T11:14:13.181" v="23" actId="14100"/>
+        <pc:sldMkLst>
+          <pc:docMk/>
+          <pc:sldMk cId="3385753680" sldId="260"/>
+        </pc:sldMkLst>
+        <pc:spChg chg="mod">
+          <ac:chgData name="Tommaso Ghilardi (Staff)" userId="b9591c49-3913-47aa-a516-44e0ea4248a4" providerId="ADAL" clId="{DC36FB0E-DC38-4EEF-9931-E787A9AA7CB8}" dt="2025-11-06T11:12:54.745" v="10"/>
+          <ac:spMkLst>
+            <pc:docMk/>
+            <pc:sldMk cId="3385753680" sldId="260"/>
+            <ac:spMk id="167" creationId="{2C358D5C-84DC-E6F3-6072-A454B4A6F02C}"/>
+          </ac:spMkLst>
+        </pc:spChg>
+        <pc:spChg chg="mod">
+          <ac:chgData name="Tommaso Ghilardi (Staff)" userId="b9591c49-3913-47aa-a516-44e0ea4248a4" providerId="ADAL" clId="{DC36FB0E-DC38-4EEF-9931-E787A9AA7CB8}" dt="2025-11-06T11:12:23.668" v="9" actId="20577"/>
+          <ac:spMkLst>
+            <pc:docMk/>
+            <pc:sldMk cId="3385753680" sldId="260"/>
+            <ac:spMk id="189" creationId="{1BB1A36C-D3DE-6779-160C-EB507B0E1C29}"/>
+          </ac:spMkLst>
+        </pc:spChg>
+        <pc:picChg chg="del">
+          <ac:chgData name="Tommaso Ghilardi (Staff)" userId="b9591c49-3913-47aa-a516-44e0ea4248a4" providerId="ADAL" clId="{DC36FB0E-DC38-4EEF-9931-E787A9AA7CB8}" dt="2025-11-06T11:13:52.262" v="11" actId="478"/>
+          <ac:picMkLst>
+            <pc:docMk/>
+            <pc:sldMk cId="3385753680" sldId="260"/>
+            <ac:picMk id="9" creationId="{96B7E7CF-8B07-A18A-4BA8-EFE88E7368B5}"/>
+          </ac:picMkLst>
+        </pc:picChg>
+        <pc:picChg chg="add mod">
+          <ac:chgData name="Tommaso Ghilardi (Staff)" userId="b9591c49-3913-47aa-a516-44e0ea4248a4" providerId="ADAL" clId="{DC36FB0E-DC38-4EEF-9931-E787A9AA7CB8}" dt="2025-11-06T11:14:08.636" v="22" actId="1076"/>
+          <ac:picMkLst>
+            <pc:docMk/>
+            <pc:sldMk cId="3385753680" sldId="260"/>
+            <ac:picMk id="16" creationId="{2D15FD57-5CD9-F935-77FF-48ADCE960190}"/>
+          </ac:picMkLst>
+        </pc:picChg>
+        <pc:picChg chg="mod">
+          <ac:chgData name="Tommaso Ghilardi (Staff)" userId="b9591c49-3913-47aa-a516-44e0ea4248a4" providerId="ADAL" clId="{DC36FB0E-DC38-4EEF-9931-E787A9AA7CB8}" dt="2025-11-06T11:14:13.181" v="23" actId="14100"/>
+          <ac:picMkLst>
+            <pc:docMk/>
+            <pc:sldMk cId="3385753680" sldId="260"/>
+            <ac:picMk id="21" creationId="{D1E95A78-6C5B-D428-4180-08ADCAFE130F}"/>
+          </ac:picMkLst>
+        </pc:picChg>
+      </pc:sldChg>
+    </pc:docChg>
+  </pc:docChgLst>
   <pc:docChgLst>
     <pc:chgData name="Tommaso Ghilardi (Staff)" userId="b9591c49-3913-47aa-a516-44e0ea4248a4" providerId="ADAL" clId="{0D36F859-059A-4DB7-AEC5-974ED1AC50D6}"/>
     <pc:docChg chg="undo custSel addSld modSld">
@@ -135,30 +191,6 @@
           <pc:docMk/>
           <pc:sldMk cId="1204861259" sldId="259"/>
         </pc:sldMkLst>
-        <pc:spChg chg="del">
-          <ac:chgData name="Tommaso Ghilardi (Staff)" userId="b9591c49-3913-47aa-a516-44e0ea4248a4" providerId="ADAL" clId="{0D36F859-059A-4DB7-AEC5-974ED1AC50D6}" dt="2025-08-29T17:03:35.915" v="392" actId="478"/>
-          <ac:spMkLst>
-            <pc:docMk/>
-            <pc:sldMk cId="1204861259" sldId="259"/>
-            <ac:spMk id="2" creationId="{59FE5820-4E9E-A0B1-F1D5-2EEDB008C3B4}"/>
-          </ac:spMkLst>
-        </pc:spChg>
-        <pc:spChg chg="add del mod">
-          <ac:chgData name="Tommaso Ghilardi (Staff)" userId="b9591c49-3913-47aa-a516-44e0ea4248a4" providerId="ADAL" clId="{0D36F859-059A-4DB7-AEC5-974ED1AC50D6}" dt="2025-08-29T17:03:40.497" v="393" actId="478"/>
-          <ac:spMkLst>
-            <pc:docMk/>
-            <pc:sldMk cId="1204861259" sldId="259"/>
-            <ac:spMk id="9" creationId="{412EC709-34A2-A3B9-FAE4-54E870E7A650}"/>
-          </ac:spMkLst>
-        </pc:spChg>
-        <pc:picChg chg="del mod">
-          <ac:chgData name="Tommaso Ghilardi (Staff)" userId="b9591c49-3913-47aa-a516-44e0ea4248a4" providerId="ADAL" clId="{0D36F859-059A-4DB7-AEC5-974ED1AC50D6}" dt="2025-08-29T17:03:26.398" v="391" actId="478"/>
-          <ac:picMkLst>
-            <pc:docMk/>
-            <pc:sldMk cId="1204861259" sldId="259"/>
-            <ac:picMk id="19" creationId="{BC084F83-2B7D-4036-2DCD-49AFF9BD8F45}"/>
-          </ac:picMkLst>
-        </pc:picChg>
       </pc:sldChg>
       <pc:sldChg chg="addSp delSp modSp add mod">
         <pc:chgData name="Tommaso Ghilardi (Staff)" userId="b9591c49-3913-47aa-a516-44e0ea4248a4" providerId="ADAL" clId="{0D36F859-059A-4DB7-AEC5-974ED1AC50D6}" dt="2025-08-29T17:03:21.076" v="389" actId="478"/>
@@ -166,494 +198,6 @@
           <pc:docMk/>
           <pc:sldMk cId="3385753680" sldId="260"/>
         </pc:sldMkLst>
-        <pc:spChg chg="mod">
-          <ac:chgData name="Tommaso Ghilardi (Staff)" userId="b9591c49-3913-47aa-a516-44e0ea4248a4" providerId="ADAL" clId="{0D36F859-059A-4DB7-AEC5-974ED1AC50D6}" dt="2025-08-29T16:50:50.241" v="1" actId="20577"/>
-          <ac:spMkLst>
-            <pc:docMk/>
-            <pc:sldMk cId="3385753680" sldId="260"/>
-            <ac:spMk id="2" creationId="{3748DC45-1C88-F4F3-6E74-437B32A04A5F}"/>
-          </ac:spMkLst>
-        </pc:spChg>
-        <pc:spChg chg="add del mod">
-          <ac:chgData name="Tommaso Ghilardi (Staff)" userId="b9591c49-3913-47aa-a516-44e0ea4248a4" providerId="ADAL" clId="{0D36F859-059A-4DB7-AEC5-974ED1AC50D6}" dt="2025-08-29T16:53:43.476" v="209" actId="478"/>
-          <ac:spMkLst>
-            <pc:docMk/>
-            <pc:sldMk cId="3385753680" sldId="260"/>
-            <ac:spMk id="3" creationId="{4238F431-CBC6-70D4-2A63-C19FD892FFF7}"/>
-          </ac:spMkLst>
-        </pc:spChg>
-        <pc:spChg chg="add del mod">
-          <ac:chgData name="Tommaso Ghilardi (Staff)" userId="b9591c49-3913-47aa-a516-44e0ea4248a4" providerId="ADAL" clId="{0D36F859-059A-4DB7-AEC5-974ED1AC50D6}" dt="2025-08-29T16:53:43.476" v="209" actId="478"/>
-          <ac:spMkLst>
-            <pc:docMk/>
-            <pc:sldMk cId="3385753680" sldId="260"/>
-            <ac:spMk id="5" creationId="{E78BA163-CC21-5A6C-5876-6558AE603B57}"/>
-          </ac:spMkLst>
-        </pc:spChg>
-        <pc:spChg chg="add mod">
-          <ac:chgData name="Tommaso Ghilardi (Staff)" userId="b9591c49-3913-47aa-a516-44e0ea4248a4" providerId="ADAL" clId="{0D36F859-059A-4DB7-AEC5-974ED1AC50D6}" dt="2025-08-29T17:02:51.446" v="383" actId="1076"/>
-          <ac:spMkLst>
-            <pc:docMk/>
-            <pc:sldMk cId="3385753680" sldId="260"/>
-            <ac:spMk id="15" creationId="{DFA300B6-B8C7-EDBD-7039-BF06054D7791}"/>
-          </ac:spMkLst>
-        </pc:spChg>
-        <pc:spChg chg="del mod">
-          <ac:chgData name="Tommaso Ghilardi (Staff)" userId="b9591c49-3913-47aa-a516-44e0ea4248a4" providerId="ADAL" clId="{0D36F859-059A-4DB7-AEC5-974ED1AC50D6}" dt="2025-08-29T16:57:08.809" v="264" actId="478"/>
-          <ac:spMkLst>
-            <pc:docMk/>
-            <pc:sldMk cId="3385753680" sldId="260"/>
-            <ac:spMk id="30" creationId="{0BFEE132-9003-E1BC-9F57-C3A49C16AC56}"/>
-          </ac:spMkLst>
-        </pc:spChg>
-        <pc:spChg chg="del mod">
-          <ac:chgData name="Tommaso Ghilardi (Staff)" userId="b9591c49-3913-47aa-a516-44e0ea4248a4" providerId="ADAL" clId="{0D36F859-059A-4DB7-AEC5-974ED1AC50D6}" dt="2025-08-29T16:51:19.208" v="15" actId="478"/>
-          <ac:spMkLst>
-            <pc:docMk/>
-            <pc:sldMk cId="3385753680" sldId="260"/>
-            <ac:spMk id="46" creationId="{5D577444-4004-045D-7A05-42398BC3B111}"/>
-          </ac:spMkLst>
-        </pc:spChg>
-        <pc:spChg chg="del">
-          <ac:chgData name="Tommaso Ghilardi (Staff)" userId="b9591c49-3913-47aa-a516-44e0ea4248a4" providerId="ADAL" clId="{0D36F859-059A-4DB7-AEC5-974ED1AC50D6}" dt="2025-08-29T16:51:19.208" v="15" actId="478"/>
-          <ac:spMkLst>
-            <pc:docMk/>
-            <pc:sldMk cId="3385753680" sldId="260"/>
-            <ac:spMk id="48" creationId="{941FA761-963D-7074-0F49-89CD7A0ADC8A}"/>
-          </ac:spMkLst>
-        </pc:spChg>
-        <pc:spChg chg="del">
-          <ac:chgData name="Tommaso Ghilardi (Staff)" userId="b9591c49-3913-47aa-a516-44e0ea4248a4" providerId="ADAL" clId="{0D36F859-059A-4DB7-AEC5-974ED1AC50D6}" dt="2025-08-29T16:51:10.594" v="14" actId="478"/>
-          <ac:spMkLst>
-            <pc:docMk/>
-            <pc:sldMk cId="3385753680" sldId="260"/>
-            <ac:spMk id="55" creationId="{397E92F6-12CB-919D-9579-40A8F87F3152}"/>
-          </ac:spMkLst>
-        </pc:spChg>
-        <pc:spChg chg="del">
-          <ac:chgData name="Tommaso Ghilardi (Staff)" userId="b9591c49-3913-47aa-a516-44e0ea4248a4" providerId="ADAL" clId="{0D36F859-059A-4DB7-AEC5-974ED1AC50D6}" dt="2025-08-29T16:51:19.208" v="15" actId="478"/>
-          <ac:spMkLst>
-            <pc:docMk/>
-            <pc:sldMk cId="3385753680" sldId="260"/>
-            <ac:spMk id="57" creationId="{48CB3AF2-EDA0-C60B-231C-02F2FE1E50D3}"/>
-          </ac:spMkLst>
-        </pc:spChg>
-        <pc:spChg chg="del">
-          <ac:chgData name="Tommaso Ghilardi (Staff)" userId="b9591c49-3913-47aa-a516-44e0ea4248a4" providerId="ADAL" clId="{0D36F859-059A-4DB7-AEC5-974ED1AC50D6}" dt="2025-08-29T16:51:09.157" v="13" actId="478"/>
-          <ac:spMkLst>
-            <pc:docMk/>
-            <pc:sldMk cId="3385753680" sldId="260"/>
-            <ac:spMk id="58" creationId="{4CE6EDC1-2D79-C335-0605-9FDB68DA9803}"/>
-          </ac:spMkLst>
-        </pc:spChg>
-        <pc:spChg chg="mod">
-          <ac:chgData name="Tommaso Ghilardi (Staff)" userId="b9591c49-3913-47aa-a516-44e0ea4248a4" providerId="ADAL" clId="{0D36F859-059A-4DB7-AEC5-974ED1AC50D6}" dt="2025-08-29T17:02:01.529" v="362" actId="20577"/>
-          <ac:spMkLst>
-            <pc:docMk/>
-            <pc:sldMk cId="3385753680" sldId="260"/>
-            <ac:spMk id="59" creationId="{F07EBDBA-B9A2-C1C0-86D1-AF3EBFCB1786}"/>
-          </ac:spMkLst>
-        </pc:spChg>
-        <pc:spChg chg="del">
-          <ac:chgData name="Tommaso Ghilardi (Staff)" userId="b9591c49-3913-47aa-a516-44e0ea4248a4" providerId="ADAL" clId="{0D36F859-059A-4DB7-AEC5-974ED1AC50D6}" dt="2025-08-29T16:51:19.208" v="15" actId="478"/>
-          <ac:spMkLst>
-            <pc:docMk/>
-            <pc:sldMk cId="3385753680" sldId="260"/>
-            <ac:spMk id="65" creationId="{70F39C8F-F3FF-145F-76A6-F81ED7E104C9}"/>
-          </ac:spMkLst>
-        </pc:spChg>
-        <pc:spChg chg="mod">
-          <ac:chgData name="Tommaso Ghilardi (Staff)" userId="b9591c49-3913-47aa-a516-44e0ea4248a4" providerId="ADAL" clId="{0D36F859-059A-4DB7-AEC5-974ED1AC50D6}" dt="2025-08-29T16:53:56.069" v="212" actId="14100"/>
-          <ac:spMkLst>
-            <pc:docMk/>
-            <pc:sldMk cId="3385753680" sldId="260"/>
-            <ac:spMk id="103" creationId="{B1A42515-5043-D454-C58F-AD7C1FC354C3}"/>
-          </ac:spMkLst>
-        </pc:spChg>
-        <pc:spChg chg="mod">
-          <ac:chgData name="Tommaso Ghilardi (Staff)" userId="b9591c49-3913-47aa-a516-44e0ea4248a4" providerId="ADAL" clId="{0D36F859-059A-4DB7-AEC5-974ED1AC50D6}" dt="2025-08-29T16:51:53.725" v="52" actId="20577"/>
-          <ac:spMkLst>
-            <pc:docMk/>
-            <pc:sldMk cId="3385753680" sldId="260"/>
-            <ac:spMk id="160" creationId="{A61DCCA1-F9C2-5B0C-BE08-514DB17B7324}"/>
-          </ac:spMkLst>
-        </pc:spChg>
-        <pc:spChg chg="mod">
-          <ac:chgData name="Tommaso Ghilardi (Staff)" userId="b9591c49-3913-47aa-a516-44e0ea4248a4" providerId="ADAL" clId="{0D36F859-059A-4DB7-AEC5-974ED1AC50D6}" dt="2025-08-29T16:51:33.708" v="20" actId="1076"/>
-          <ac:spMkLst>
-            <pc:docMk/>
-            <pc:sldMk cId="3385753680" sldId="260"/>
-            <ac:spMk id="165" creationId="{E18E0C6C-DF41-F5BB-E99B-07D7F78A9468}"/>
-          </ac:spMkLst>
-        </pc:spChg>
-        <pc:spChg chg="mod">
-          <ac:chgData name="Tommaso Ghilardi (Staff)" userId="b9591c49-3913-47aa-a516-44e0ea4248a4" providerId="ADAL" clId="{0D36F859-059A-4DB7-AEC5-974ED1AC50D6}" dt="2025-08-29T16:51:33.708" v="20" actId="1076"/>
-          <ac:spMkLst>
-            <pc:docMk/>
-            <pc:sldMk cId="3385753680" sldId="260"/>
-            <ac:spMk id="167" creationId="{2C358D5C-84DC-E6F3-6072-A454B4A6F02C}"/>
-          </ac:spMkLst>
-        </pc:spChg>
-        <pc:spChg chg="mod">
-          <ac:chgData name="Tommaso Ghilardi (Staff)" userId="b9591c49-3913-47aa-a516-44e0ea4248a4" providerId="ADAL" clId="{0D36F859-059A-4DB7-AEC5-974ED1AC50D6}" dt="2025-08-29T16:52:16.847" v="110" actId="20577"/>
-          <ac:spMkLst>
-            <pc:docMk/>
-            <pc:sldMk cId="3385753680" sldId="260"/>
-            <ac:spMk id="189" creationId="{1BB1A36C-D3DE-6779-160C-EB507B0E1C29}"/>
-          </ac:spMkLst>
-        </pc:spChg>
-        <pc:spChg chg="mod">
-          <ac:chgData name="Tommaso Ghilardi (Staff)" userId="b9591c49-3913-47aa-a516-44e0ea4248a4" providerId="ADAL" clId="{0D36F859-059A-4DB7-AEC5-974ED1AC50D6}" dt="2025-08-29T16:51:33.708" v="20" actId="1076"/>
-          <ac:spMkLst>
-            <pc:docMk/>
-            <pc:sldMk cId="3385753680" sldId="260"/>
-            <ac:spMk id="194" creationId="{1C5F7E85-B3CC-DDA0-268F-F46D484256DC}"/>
-          </ac:spMkLst>
-        </pc:spChg>
-        <pc:spChg chg="mod">
-          <ac:chgData name="Tommaso Ghilardi (Staff)" userId="b9591c49-3913-47aa-a516-44e0ea4248a4" providerId="ADAL" clId="{0D36F859-059A-4DB7-AEC5-974ED1AC50D6}" dt="2025-08-29T16:53:14.290" v="205" actId="313"/>
-          <ac:spMkLst>
-            <pc:docMk/>
-            <pc:sldMk cId="3385753680" sldId="260"/>
-            <ac:spMk id="196" creationId="{131AD033-4BF6-2CB9-2B20-6BCC9C88031E}"/>
-          </ac:spMkLst>
-        </pc:spChg>
-        <pc:spChg chg="mod">
-          <ac:chgData name="Tommaso Ghilardi (Staff)" userId="b9591c49-3913-47aa-a516-44e0ea4248a4" providerId="ADAL" clId="{0D36F859-059A-4DB7-AEC5-974ED1AC50D6}" dt="2025-08-29T16:51:33.708" v="20" actId="1076"/>
-          <ac:spMkLst>
-            <pc:docMk/>
-            <pc:sldMk cId="3385753680" sldId="260"/>
-            <ac:spMk id="239" creationId="{C7B4A8E9-48E6-E56C-94AA-335BCD028649}"/>
-          </ac:spMkLst>
-        </pc:spChg>
-        <pc:spChg chg="del mod">
-          <ac:chgData name="Tommaso Ghilardi (Staff)" userId="b9591c49-3913-47aa-a516-44e0ea4248a4" providerId="ADAL" clId="{0D36F859-059A-4DB7-AEC5-974ED1AC50D6}" dt="2025-08-29T16:56:54.377" v="259" actId="478"/>
-          <ac:spMkLst>
-            <pc:docMk/>
-            <pc:sldMk cId="3385753680" sldId="260"/>
-            <ac:spMk id="298" creationId="{71A6DE5D-0C93-458C-DF08-D777E40E24BF}"/>
-          </ac:spMkLst>
-        </pc:spChg>
-        <pc:spChg chg="del mod">
-          <ac:chgData name="Tommaso Ghilardi (Staff)" userId="b9591c49-3913-47aa-a516-44e0ea4248a4" providerId="ADAL" clId="{0D36F859-059A-4DB7-AEC5-974ED1AC50D6}" dt="2025-08-29T16:56:53.114" v="258" actId="478"/>
-          <ac:spMkLst>
-            <pc:docMk/>
-            <pc:sldMk cId="3385753680" sldId="260"/>
-            <ac:spMk id="299" creationId="{3B6E111B-87B6-88F9-18C1-13F24302E594}"/>
-          </ac:spMkLst>
-        </pc:spChg>
-        <pc:spChg chg="mod">
-          <ac:chgData name="Tommaso Ghilardi (Staff)" userId="b9591c49-3913-47aa-a516-44e0ea4248a4" providerId="ADAL" clId="{0D36F859-059A-4DB7-AEC5-974ED1AC50D6}" dt="2025-08-29T17:02:23.980" v="379" actId="6549"/>
-          <ac:spMkLst>
-            <pc:docMk/>
-            <pc:sldMk cId="3385753680" sldId="260"/>
-            <ac:spMk id="330" creationId="{06E73439-4535-5659-0077-DCB1656E74B8}"/>
-          </ac:spMkLst>
-        </pc:spChg>
-        <pc:spChg chg="mod">
-          <ac:chgData name="Tommaso Ghilardi (Staff)" userId="b9591c49-3913-47aa-a516-44e0ea4248a4" providerId="ADAL" clId="{0D36F859-059A-4DB7-AEC5-974ED1AC50D6}" dt="2025-08-29T17:00:49.626" v="310" actId="1076"/>
-          <ac:spMkLst>
-            <pc:docMk/>
-            <pc:sldMk cId="3385753680" sldId="260"/>
-            <ac:spMk id="346" creationId="{6809C222-3E55-5E9F-E93B-09A77EF2B877}"/>
-          </ac:spMkLst>
-        </pc:spChg>
-        <pc:spChg chg="mod">
-          <ac:chgData name="Tommaso Ghilardi (Staff)" userId="b9591c49-3913-47aa-a516-44e0ea4248a4" providerId="ADAL" clId="{0D36F859-059A-4DB7-AEC5-974ED1AC50D6}" dt="2025-08-29T17:01:40.297" v="353" actId="20577"/>
-          <ac:spMkLst>
-            <pc:docMk/>
-            <pc:sldMk cId="3385753680" sldId="260"/>
-            <ac:spMk id="351" creationId="{6EA7600C-6C54-3105-A18C-9017A16B3D21}"/>
-          </ac:spMkLst>
-        </pc:spChg>
-        <pc:spChg chg="del mod">
-          <ac:chgData name="Tommaso Ghilardi (Staff)" userId="b9591c49-3913-47aa-a516-44e0ea4248a4" providerId="ADAL" clId="{0D36F859-059A-4DB7-AEC5-974ED1AC50D6}" dt="2025-08-29T17:03:21.076" v="389" actId="478"/>
-          <ac:spMkLst>
-            <pc:docMk/>
-            <pc:sldMk cId="3385753680" sldId="260"/>
-            <ac:spMk id="356" creationId="{F81E4071-9C3F-3936-7A55-54F00982D6CD}"/>
-          </ac:spMkLst>
-        </pc:spChg>
-        <pc:spChg chg="mod">
-          <ac:chgData name="Tommaso Ghilardi (Staff)" userId="b9591c49-3913-47aa-a516-44e0ea4248a4" providerId="ADAL" clId="{0D36F859-059A-4DB7-AEC5-974ED1AC50D6}" dt="2025-08-29T17:03:00.198" v="384" actId="1076"/>
-          <ac:spMkLst>
-            <pc:docMk/>
-            <pc:sldMk cId="3385753680" sldId="260"/>
-            <ac:spMk id="363" creationId="{9319AFEF-4A5B-08F3-5D86-49BC1B2B3E0B}"/>
-          </ac:spMkLst>
-        </pc:spChg>
-        <pc:spChg chg="mod">
-          <ac:chgData name="Tommaso Ghilardi (Staff)" userId="b9591c49-3913-47aa-a516-44e0ea4248a4" providerId="ADAL" clId="{0D36F859-059A-4DB7-AEC5-974ED1AC50D6}" dt="2025-08-29T17:01:49.962" v="357" actId="1076"/>
-          <ac:spMkLst>
-            <pc:docMk/>
-            <pc:sldMk cId="3385753680" sldId="260"/>
-            <ac:spMk id="417" creationId="{C673FA4E-BE89-1311-DCFA-DAD53A6CE2E9}"/>
-          </ac:spMkLst>
-        </pc:spChg>
-        <pc:picChg chg="del">
-          <ac:chgData name="Tommaso Ghilardi (Staff)" userId="b9591c49-3913-47aa-a516-44e0ea4248a4" providerId="ADAL" clId="{0D36F859-059A-4DB7-AEC5-974ED1AC50D6}" dt="2025-08-29T16:51:19.208" v="15" actId="478"/>
-          <ac:picMkLst>
-            <pc:docMk/>
-            <pc:sldMk cId="3385753680" sldId="260"/>
-            <ac:picMk id="49" creationId="{53741F94-459C-38A9-5B3D-5299EC9BB9EB}"/>
-          </ac:picMkLst>
-        </pc:picChg>
-        <pc:picChg chg="del">
-          <ac:chgData name="Tommaso Ghilardi (Staff)" userId="b9591c49-3913-47aa-a516-44e0ea4248a4" providerId="ADAL" clId="{0D36F859-059A-4DB7-AEC5-974ED1AC50D6}" dt="2025-08-29T16:51:19.208" v="15" actId="478"/>
-          <ac:picMkLst>
-            <pc:docMk/>
-            <pc:sldMk cId="3385753680" sldId="260"/>
-            <ac:picMk id="218" creationId="{B4466213-2FCF-ECC5-A4AD-61265714B9E4}"/>
-          </ac:picMkLst>
-        </pc:picChg>
-        <pc:picChg chg="del">
-          <ac:chgData name="Tommaso Ghilardi (Staff)" userId="b9591c49-3913-47aa-a516-44e0ea4248a4" providerId="ADAL" clId="{0D36F859-059A-4DB7-AEC5-974ED1AC50D6}" dt="2025-08-29T16:51:19.208" v="15" actId="478"/>
-          <ac:picMkLst>
-            <pc:docMk/>
-            <pc:sldMk cId="3385753680" sldId="260"/>
-            <ac:picMk id="219" creationId="{0B75812E-6228-9FB2-0677-A1BC2146E6D8}"/>
-          </ac:picMkLst>
-        </pc:picChg>
-        <pc:picChg chg="del">
-          <ac:chgData name="Tommaso Ghilardi (Staff)" userId="b9591c49-3913-47aa-a516-44e0ea4248a4" providerId="ADAL" clId="{0D36F859-059A-4DB7-AEC5-974ED1AC50D6}" dt="2025-08-29T16:51:19.208" v="15" actId="478"/>
-          <ac:picMkLst>
-            <pc:docMk/>
-            <pc:sldMk cId="3385753680" sldId="260"/>
-            <ac:picMk id="231" creationId="{9B7D55D5-2163-A269-CAA1-F4FCA36B15B3}"/>
-          </ac:picMkLst>
-        </pc:picChg>
-        <pc:picChg chg="del">
-          <ac:chgData name="Tommaso Ghilardi (Staff)" userId="b9591c49-3913-47aa-a516-44e0ea4248a4" providerId="ADAL" clId="{0D36F859-059A-4DB7-AEC5-974ED1AC50D6}" dt="2025-08-29T16:51:19.208" v="15" actId="478"/>
-          <ac:picMkLst>
-            <pc:docMk/>
-            <pc:sldMk cId="3385753680" sldId="260"/>
-            <ac:picMk id="232" creationId="{1E1E8390-A6D5-1777-C487-FCD387CEAE1C}"/>
-          </ac:picMkLst>
-        </pc:picChg>
-        <pc:picChg chg="del mod">
-          <ac:chgData name="Tommaso Ghilardi (Staff)" userId="b9591c49-3913-47aa-a516-44e0ea4248a4" providerId="ADAL" clId="{0D36F859-059A-4DB7-AEC5-974ED1AC50D6}" dt="2025-08-29T17:03:21.076" v="389" actId="478"/>
-          <ac:picMkLst>
-            <pc:docMk/>
-            <pc:sldMk cId="3385753680" sldId="260"/>
-            <ac:picMk id="328" creationId="{EEAE8B6C-EA69-122F-76F4-A86929B74159}"/>
-          </ac:picMkLst>
-        </pc:picChg>
-        <pc:picChg chg="del mod">
-          <ac:chgData name="Tommaso Ghilardi (Staff)" userId="b9591c49-3913-47aa-a516-44e0ea4248a4" providerId="ADAL" clId="{0D36F859-059A-4DB7-AEC5-974ED1AC50D6}" dt="2025-08-29T17:03:21.076" v="389" actId="478"/>
-          <ac:picMkLst>
-            <pc:docMk/>
-            <pc:sldMk cId="3385753680" sldId="260"/>
-            <ac:picMk id="329" creationId="{684E2AF0-08DB-7292-318E-AAED010CED5C}"/>
-          </ac:picMkLst>
-        </pc:picChg>
-        <pc:picChg chg="del mod">
-          <ac:chgData name="Tommaso Ghilardi (Staff)" userId="b9591c49-3913-47aa-a516-44e0ea4248a4" providerId="ADAL" clId="{0D36F859-059A-4DB7-AEC5-974ED1AC50D6}" dt="2025-08-29T17:03:21.076" v="389" actId="478"/>
-          <ac:picMkLst>
-            <pc:docMk/>
-            <pc:sldMk cId="3385753680" sldId="260"/>
-            <ac:picMk id="386" creationId="{A66B6261-4C85-1A9A-B853-025B22A29C5C}"/>
-          </ac:picMkLst>
-        </pc:picChg>
-        <pc:picChg chg="del mod">
-          <ac:chgData name="Tommaso Ghilardi (Staff)" userId="b9591c49-3913-47aa-a516-44e0ea4248a4" providerId="ADAL" clId="{0D36F859-059A-4DB7-AEC5-974ED1AC50D6}" dt="2025-08-29T17:03:21.076" v="389" actId="478"/>
-          <ac:picMkLst>
-            <pc:docMk/>
-            <pc:sldMk cId="3385753680" sldId="260"/>
-            <ac:picMk id="387" creationId="{004917E4-DCC6-F5B4-0940-240A6157C6B4}"/>
-          </ac:picMkLst>
-        </pc:picChg>
-        <pc:picChg chg="del">
-          <ac:chgData name="Tommaso Ghilardi (Staff)" userId="b9591c49-3913-47aa-a516-44e0ea4248a4" providerId="ADAL" clId="{0D36F859-059A-4DB7-AEC5-974ED1AC50D6}" dt="2025-08-29T16:51:19.208" v="15" actId="478"/>
-          <ac:picMkLst>
-            <pc:docMk/>
-            <pc:sldMk cId="3385753680" sldId="260"/>
-            <ac:picMk id="407" creationId="{CB5C006F-95EA-F4DA-4FE5-7FC533EBF55F}"/>
-          </ac:picMkLst>
-        </pc:picChg>
-        <pc:picChg chg="mod">
-          <ac:chgData name="Tommaso Ghilardi (Staff)" userId="b9591c49-3913-47aa-a516-44e0ea4248a4" providerId="ADAL" clId="{0D36F859-059A-4DB7-AEC5-974ED1AC50D6}" dt="2025-08-29T17:01:49.962" v="357" actId="1076"/>
-          <ac:picMkLst>
-            <pc:docMk/>
-            <pc:sldMk cId="3385753680" sldId="260"/>
-            <ac:picMk id="416" creationId="{8D83BF76-9546-066C-77A5-32747A545941}"/>
-          </ac:picMkLst>
-        </pc:picChg>
-        <pc:cxnChg chg="add del mod">
-          <ac:chgData name="Tommaso Ghilardi (Staff)" userId="b9591c49-3913-47aa-a516-44e0ea4248a4" providerId="ADAL" clId="{0D36F859-059A-4DB7-AEC5-974ED1AC50D6}" dt="2025-08-29T16:53:43.476" v="209" actId="478"/>
-          <ac:cxnSpMkLst>
-            <pc:docMk/>
-            <pc:sldMk cId="3385753680" sldId="260"/>
-            <ac:cxnSpMk id="4" creationId="{077E0776-C5F5-7692-410C-01E8CFEB20AD}"/>
-          </ac:cxnSpMkLst>
-        </pc:cxnChg>
-        <pc:cxnChg chg="add del mod">
-          <ac:chgData name="Tommaso Ghilardi (Staff)" userId="b9591c49-3913-47aa-a516-44e0ea4248a4" providerId="ADAL" clId="{0D36F859-059A-4DB7-AEC5-974ED1AC50D6}" dt="2025-08-29T17:03:13.744" v="388" actId="14100"/>
-          <ac:cxnSpMkLst>
-            <pc:docMk/>
-            <pc:sldMk cId="3385753680" sldId="260"/>
-            <ac:cxnSpMk id="6" creationId="{D33B770E-6D91-B9DE-FF27-B21102EDE9B6}"/>
-          </ac:cxnSpMkLst>
-        </pc:cxnChg>
-        <pc:cxnChg chg="del mod">
-          <ac:chgData name="Tommaso Ghilardi (Staff)" userId="b9591c49-3913-47aa-a516-44e0ea4248a4" providerId="ADAL" clId="{0D36F859-059A-4DB7-AEC5-974ED1AC50D6}" dt="2025-08-29T16:53:46.003" v="210" actId="478"/>
-          <ac:cxnSpMkLst>
-            <pc:docMk/>
-            <pc:sldMk cId="3385753680" sldId="260"/>
-            <ac:cxnSpMk id="7" creationId="{7FC1F429-7D42-ED33-F925-75B747EE298B}"/>
-          </ac:cxnSpMkLst>
-        </pc:cxnChg>
-        <pc:cxnChg chg="mod">
-          <ac:chgData name="Tommaso Ghilardi (Staff)" userId="b9591c49-3913-47aa-a516-44e0ea4248a4" providerId="ADAL" clId="{0D36F859-059A-4DB7-AEC5-974ED1AC50D6}" dt="2025-08-29T17:01:08.278" v="316" actId="14100"/>
-          <ac:cxnSpMkLst>
-            <pc:docMk/>
-            <pc:sldMk cId="3385753680" sldId="260"/>
-            <ac:cxnSpMk id="42" creationId="{C00EAA6A-967F-B7BB-A566-B570DBCA4121}"/>
-          </ac:cxnSpMkLst>
-        </pc:cxnChg>
-        <pc:cxnChg chg="add mod">
-          <ac:chgData name="Tommaso Ghilardi (Staff)" userId="b9591c49-3913-47aa-a516-44e0ea4248a4" providerId="ADAL" clId="{0D36F859-059A-4DB7-AEC5-974ED1AC50D6}" dt="2025-08-29T17:03:00.198" v="384" actId="1076"/>
-          <ac:cxnSpMkLst>
-            <pc:docMk/>
-            <pc:sldMk cId="3385753680" sldId="260"/>
-            <ac:cxnSpMk id="44" creationId="{2836FF54-7FB5-3244-0498-FA1DACEB38DF}"/>
-          </ac:cxnSpMkLst>
-        </pc:cxnChg>
-        <pc:cxnChg chg="mod">
-          <ac:chgData name="Tommaso Ghilardi (Staff)" userId="b9591c49-3913-47aa-a516-44e0ea4248a4" providerId="ADAL" clId="{0D36F859-059A-4DB7-AEC5-974ED1AC50D6}" dt="2025-08-29T17:02:51.446" v="383" actId="1076"/>
-          <ac:cxnSpMkLst>
-            <pc:docMk/>
-            <pc:sldMk cId="3385753680" sldId="260"/>
-            <ac:cxnSpMk id="47" creationId="{4A3CC929-CA90-82AB-8D75-D1AB63940ECD}"/>
-          </ac:cxnSpMkLst>
-        </pc:cxnChg>
-        <pc:cxnChg chg="del mod">
-          <ac:chgData name="Tommaso Ghilardi (Staff)" userId="b9591c49-3913-47aa-a516-44e0ea4248a4" providerId="ADAL" clId="{0D36F859-059A-4DB7-AEC5-974ED1AC50D6}" dt="2025-08-29T16:56:00.459" v="248" actId="478"/>
-          <ac:cxnSpMkLst>
-            <pc:docMk/>
-            <pc:sldMk cId="3385753680" sldId="260"/>
-            <ac:cxnSpMk id="56" creationId="{4E409A1F-0B0C-A5A5-EC82-02617E2F3C8F}"/>
-          </ac:cxnSpMkLst>
-        </pc:cxnChg>
-        <pc:cxnChg chg="del mod">
-          <ac:chgData name="Tommaso Ghilardi (Staff)" userId="b9591c49-3913-47aa-a516-44e0ea4248a4" providerId="ADAL" clId="{0D36F859-059A-4DB7-AEC5-974ED1AC50D6}" dt="2025-08-29T16:55:58.844" v="247" actId="478"/>
-          <ac:cxnSpMkLst>
-            <pc:docMk/>
-            <pc:sldMk cId="3385753680" sldId="260"/>
-            <ac:cxnSpMk id="77" creationId="{7A98067A-59E9-9BC9-87FD-E3C716C9B0E0}"/>
-          </ac:cxnSpMkLst>
-        </pc:cxnChg>
-        <pc:cxnChg chg="mod">
-          <ac:chgData name="Tommaso Ghilardi (Staff)" userId="b9591c49-3913-47aa-a516-44e0ea4248a4" providerId="ADAL" clId="{0D36F859-059A-4DB7-AEC5-974ED1AC50D6}" dt="2025-08-29T16:51:10.594" v="14" actId="478"/>
-          <ac:cxnSpMkLst>
-            <pc:docMk/>
-            <pc:sldMk cId="3385753680" sldId="260"/>
-            <ac:cxnSpMk id="81" creationId="{496AE5A8-14D6-76BC-E6C9-7EA3D5C74615}"/>
-          </ac:cxnSpMkLst>
-        </pc:cxnChg>
-        <pc:cxnChg chg="add mod">
-          <ac:chgData name="Tommaso Ghilardi (Staff)" userId="b9591c49-3913-47aa-a516-44e0ea4248a4" providerId="ADAL" clId="{0D36F859-059A-4DB7-AEC5-974ED1AC50D6}" dt="2025-08-29T17:03:10.345" v="387" actId="14100"/>
-          <ac:cxnSpMkLst>
-            <pc:docMk/>
-            <pc:sldMk cId="3385753680" sldId="260"/>
-            <ac:cxnSpMk id="111" creationId="{8B1D3DBF-AFA1-3F17-A964-7072F2A83972}"/>
-          </ac:cxnSpMkLst>
-        </pc:cxnChg>
-        <pc:cxnChg chg="del">
-          <ac:chgData name="Tommaso Ghilardi (Staff)" userId="b9591c49-3913-47aa-a516-44e0ea4248a4" providerId="ADAL" clId="{0D36F859-059A-4DB7-AEC5-974ED1AC50D6}" dt="2025-08-29T16:51:20.729" v="16" actId="478"/>
-          <ac:cxnSpMkLst>
-            <pc:docMk/>
-            <pc:sldMk cId="3385753680" sldId="260"/>
-            <ac:cxnSpMk id="139" creationId="{30F5EF37-760A-B73C-06F4-3A16004D2AA9}"/>
-          </ac:cxnSpMkLst>
-        </pc:cxnChg>
-        <pc:cxnChg chg="del mod">
-          <ac:chgData name="Tommaso Ghilardi (Staff)" userId="b9591c49-3913-47aa-a516-44e0ea4248a4" providerId="ADAL" clId="{0D36F859-059A-4DB7-AEC5-974ED1AC50D6}" dt="2025-08-29T16:51:21.814" v="17" actId="478"/>
-          <ac:cxnSpMkLst>
-            <pc:docMk/>
-            <pc:sldMk cId="3385753680" sldId="260"/>
-            <ac:cxnSpMk id="246" creationId="{CDA48363-35EE-FE14-D1FE-FB2C448F110D}"/>
-          </ac:cxnSpMkLst>
-        </pc:cxnChg>
-        <pc:cxnChg chg="mod">
-          <ac:chgData name="Tommaso Ghilardi (Staff)" userId="b9591c49-3913-47aa-a516-44e0ea4248a4" providerId="ADAL" clId="{0D36F859-059A-4DB7-AEC5-974ED1AC50D6}" dt="2025-08-29T16:51:10.594" v="14" actId="478"/>
-          <ac:cxnSpMkLst>
-            <pc:docMk/>
-            <pc:sldMk cId="3385753680" sldId="260"/>
-            <ac:cxnSpMk id="255" creationId="{DC3F058D-23BA-7EAB-8CFE-4975D63ADCA9}"/>
-          </ac:cxnSpMkLst>
-        </pc:cxnChg>
-        <pc:cxnChg chg="mod">
-          <ac:chgData name="Tommaso Ghilardi (Staff)" userId="b9591c49-3913-47aa-a516-44e0ea4248a4" providerId="ADAL" clId="{0D36F859-059A-4DB7-AEC5-974ED1AC50D6}" dt="2025-08-29T16:51:10.594" v="14" actId="478"/>
-          <ac:cxnSpMkLst>
-            <pc:docMk/>
-            <pc:sldMk cId="3385753680" sldId="260"/>
-            <ac:cxnSpMk id="260" creationId="{8E4F25D4-F311-CF38-7A55-7AA629F037C8}"/>
-          </ac:cxnSpMkLst>
-        </pc:cxnChg>
-        <pc:cxnChg chg="mod">
-          <ac:chgData name="Tommaso Ghilardi (Staff)" userId="b9591c49-3913-47aa-a516-44e0ea4248a4" providerId="ADAL" clId="{0D36F859-059A-4DB7-AEC5-974ED1AC50D6}" dt="2025-08-29T17:02:51.446" v="383" actId="1076"/>
-          <ac:cxnSpMkLst>
-            <pc:docMk/>
-            <pc:sldMk cId="3385753680" sldId="260"/>
-            <ac:cxnSpMk id="304" creationId="{822D1E2E-9485-3C91-2BB2-2AC81CEFBC67}"/>
-          </ac:cxnSpMkLst>
-        </pc:cxnChg>
-        <pc:cxnChg chg="del mod">
-          <ac:chgData name="Tommaso Ghilardi (Staff)" userId="b9591c49-3913-47aa-a516-44e0ea4248a4" providerId="ADAL" clId="{0D36F859-059A-4DB7-AEC5-974ED1AC50D6}" dt="2025-08-29T16:56:56.151" v="260" actId="478"/>
-          <ac:cxnSpMkLst>
-            <pc:docMk/>
-            <pc:sldMk cId="3385753680" sldId="260"/>
-            <ac:cxnSpMk id="307" creationId="{4EFC1BBF-75F3-F3AD-BF42-45C3017DB253}"/>
-          </ac:cxnSpMkLst>
-        </pc:cxnChg>
-        <pc:cxnChg chg="mod">
-          <ac:chgData name="Tommaso Ghilardi (Staff)" userId="b9591c49-3913-47aa-a516-44e0ea4248a4" providerId="ADAL" clId="{0D36F859-059A-4DB7-AEC5-974ED1AC50D6}" dt="2025-08-29T16:55:17.293" v="238" actId="1076"/>
-          <ac:cxnSpMkLst>
-            <pc:docMk/>
-            <pc:sldMk cId="3385753680" sldId="260"/>
-            <ac:cxnSpMk id="343" creationId="{B8C07C79-7EFF-6FE1-6526-5CC9627CA14E}"/>
-          </ac:cxnSpMkLst>
-        </pc:cxnChg>
-        <pc:cxnChg chg="mod">
-          <ac:chgData name="Tommaso Ghilardi (Staff)" userId="b9591c49-3913-47aa-a516-44e0ea4248a4" providerId="ADAL" clId="{0D36F859-059A-4DB7-AEC5-974ED1AC50D6}" dt="2025-08-29T17:00:49.626" v="310" actId="1076"/>
-          <ac:cxnSpMkLst>
-            <pc:docMk/>
-            <pc:sldMk cId="3385753680" sldId="260"/>
-            <ac:cxnSpMk id="347" creationId="{861F0CE3-0B2A-7E23-9376-9E2C88802F94}"/>
-          </ac:cxnSpMkLst>
-        </pc:cxnChg>
-        <pc:cxnChg chg="mod">
-          <ac:chgData name="Tommaso Ghilardi (Staff)" userId="b9591c49-3913-47aa-a516-44e0ea4248a4" providerId="ADAL" clId="{0D36F859-059A-4DB7-AEC5-974ED1AC50D6}" dt="2025-08-29T17:03:00.198" v="384" actId="1076"/>
-          <ac:cxnSpMkLst>
-            <pc:docMk/>
-            <pc:sldMk cId="3385753680" sldId="260"/>
-            <ac:cxnSpMk id="352" creationId="{CB6E61C5-BC83-A3BD-C4DB-BAC64DD46273}"/>
-          </ac:cxnSpMkLst>
-        </pc:cxnChg>
-        <pc:cxnChg chg="del mod">
-          <ac:chgData name="Tommaso Ghilardi (Staff)" userId="b9591c49-3913-47aa-a516-44e0ea4248a4" providerId="ADAL" clId="{0D36F859-059A-4DB7-AEC5-974ED1AC50D6}" dt="2025-08-29T17:03:21.076" v="389" actId="478"/>
-          <ac:cxnSpMkLst>
-            <pc:docMk/>
-            <pc:sldMk cId="3385753680" sldId="260"/>
-            <ac:cxnSpMk id="370" creationId="{FB3A4D33-5591-4BC0-C6A4-8420EEDF5EE2}"/>
-          </ac:cxnSpMkLst>
-        </pc:cxnChg>
-        <pc:cxnChg chg="del mod">
-          <ac:chgData name="Tommaso Ghilardi (Staff)" userId="b9591c49-3913-47aa-a516-44e0ea4248a4" providerId="ADAL" clId="{0D36F859-059A-4DB7-AEC5-974ED1AC50D6}" dt="2025-08-29T16:56:39.988" v="254" actId="478"/>
-          <ac:cxnSpMkLst>
-            <pc:docMk/>
-            <pc:sldMk cId="3385753680" sldId="260"/>
-            <ac:cxnSpMk id="380" creationId="{C0EDC56A-07D7-E80D-014E-12CF479B2423}"/>
-          </ac:cxnSpMkLst>
-        </pc:cxnChg>
-        <pc:cxnChg chg="del mod">
-          <ac:chgData name="Tommaso Ghilardi (Staff)" userId="b9591c49-3913-47aa-a516-44e0ea4248a4" providerId="ADAL" clId="{0D36F859-059A-4DB7-AEC5-974ED1AC50D6}" dt="2025-08-29T16:56:02.784" v="249" actId="478"/>
-          <ac:cxnSpMkLst>
-            <pc:docMk/>
-            <pc:sldMk cId="3385753680" sldId="260"/>
-            <ac:cxnSpMk id="389" creationId="{0CD123E9-D16A-162A-4B74-E03D8E0A6DD4}"/>
-          </ac:cxnSpMkLst>
-        </pc:cxnChg>
       </pc:sldChg>
     </pc:docChg>
   </pc:docChgLst>
@@ -840,318 +384,6 @@
           <pc:docMk/>
           <pc:sldMk cId="3385753680" sldId="260"/>
         </pc:sldMkLst>
-        <pc:spChg chg="del">
-          <ac:chgData name="Tommaso Ghilardi (Staff)" userId="b9591c49-3913-47aa-a516-44e0ea4248a4" providerId="ADAL" clId="{DFF45E3B-A62A-4CBF-971A-719412A1D47F}" dt="2025-08-29T17:06:46.204" v="2" actId="478"/>
-          <ac:spMkLst>
-            <pc:docMk/>
-            <pc:sldMk cId="3385753680" sldId="260"/>
-            <ac:spMk id="2" creationId="{3748DC45-1C88-F4F3-6E74-437B32A04A5F}"/>
-          </ac:spMkLst>
-        </pc:spChg>
-        <pc:spChg chg="add mod">
-          <ac:chgData name="Tommaso Ghilardi (Staff)" userId="b9591c49-3913-47aa-a516-44e0ea4248a4" providerId="ADAL" clId="{DFF45E3B-A62A-4CBF-971A-719412A1D47F}" dt="2025-08-30T21:35:32.421" v="244" actId="552"/>
-          <ac:spMkLst>
-            <pc:docMk/>
-            <pc:sldMk cId="3385753680" sldId="260"/>
-            <ac:spMk id="4" creationId="{1C59D9BA-21AA-E8EB-F940-86046CC7181D}"/>
-          </ac:spMkLst>
-        </pc:spChg>
-        <pc:spChg chg="add del mod">
-          <ac:chgData name="Tommaso Ghilardi (Staff)" userId="b9591c49-3913-47aa-a516-44e0ea4248a4" providerId="ADAL" clId="{DFF45E3B-A62A-4CBF-971A-719412A1D47F}" dt="2025-08-29T17:06:49.518" v="3" actId="478"/>
-          <ac:spMkLst>
-            <pc:docMk/>
-            <pc:sldMk cId="3385753680" sldId="260"/>
-            <ac:spMk id="4" creationId="{4EDBBF45-AFCF-199F-DAC5-0609DAAA82B7}"/>
-          </ac:spMkLst>
-        </pc:spChg>
-        <pc:spChg chg="mod">
-          <ac:chgData name="Tommaso Ghilardi (Staff)" userId="b9591c49-3913-47aa-a516-44e0ea4248a4" providerId="ADAL" clId="{DFF45E3B-A62A-4CBF-971A-719412A1D47F}" dt="2025-08-29T17:09:02.087" v="99"/>
-          <ac:spMkLst>
-            <pc:docMk/>
-            <pc:sldMk cId="3385753680" sldId="260"/>
-            <ac:spMk id="15" creationId="{DFA300B6-B8C7-EDBD-7039-BF06054D7791}"/>
-          </ac:spMkLst>
-        </pc:spChg>
-        <pc:spChg chg="mod">
-          <ac:chgData name="Tommaso Ghilardi (Staff)" userId="b9591c49-3913-47aa-a516-44e0ea4248a4" providerId="ADAL" clId="{DFF45E3B-A62A-4CBF-971A-719412A1D47F}" dt="2025-08-29T17:09:02.087" v="99"/>
-          <ac:spMkLst>
-            <pc:docMk/>
-            <pc:sldMk cId="3385753680" sldId="260"/>
-            <ac:spMk id="26" creationId="{DE52ED16-3007-AB19-BDC5-44710B8FB1FA}"/>
-          </ac:spMkLst>
-        </pc:spChg>
-        <pc:spChg chg="mod">
-          <ac:chgData name="Tommaso Ghilardi (Staff)" userId="b9591c49-3913-47aa-a516-44e0ea4248a4" providerId="ADAL" clId="{DFF45E3B-A62A-4CBF-971A-719412A1D47F}" dt="2025-08-29T17:09:02.087" v="99"/>
-          <ac:spMkLst>
-            <pc:docMk/>
-            <pc:sldMk cId="3385753680" sldId="260"/>
-            <ac:spMk id="28" creationId="{E3D30ABE-5AEC-2E6E-1C47-F83E43E09A0A}"/>
-          </ac:spMkLst>
-        </pc:spChg>
-        <pc:spChg chg="mod">
-          <ac:chgData name="Tommaso Ghilardi (Staff)" userId="b9591c49-3913-47aa-a516-44e0ea4248a4" providerId="ADAL" clId="{DFF45E3B-A62A-4CBF-971A-719412A1D47F}" dt="2025-08-29T17:09:18.280" v="140" actId="1036"/>
-          <ac:spMkLst>
-            <pc:docMk/>
-            <pc:sldMk cId="3385753680" sldId="260"/>
-            <ac:spMk id="59" creationId="{F07EBDBA-B9A2-C1C0-86D1-AF3EBFCB1786}"/>
-          </ac:spMkLst>
-        </pc:spChg>
-        <pc:spChg chg="mod">
-          <ac:chgData name="Tommaso Ghilardi (Staff)" userId="b9591c49-3913-47aa-a516-44e0ea4248a4" providerId="ADAL" clId="{DFF45E3B-A62A-4CBF-971A-719412A1D47F}" dt="2025-08-29T17:09:18.280" v="140" actId="1036"/>
-          <ac:spMkLst>
-            <pc:docMk/>
-            <pc:sldMk cId="3385753680" sldId="260"/>
-            <ac:spMk id="103" creationId="{B1A42515-5043-D454-C58F-AD7C1FC354C3}"/>
-          </ac:spMkLst>
-        </pc:spChg>
-        <pc:spChg chg="mod">
-          <ac:chgData name="Tommaso Ghilardi (Staff)" userId="b9591c49-3913-47aa-a516-44e0ea4248a4" providerId="ADAL" clId="{DFF45E3B-A62A-4CBF-971A-719412A1D47F}" dt="2025-08-29T17:09:18.280" v="140" actId="1036"/>
-          <ac:spMkLst>
-            <pc:docMk/>
-            <pc:sldMk cId="3385753680" sldId="260"/>
-            <ac:spMk id="160" creationId="{A61DCCA1-F9C2-5B0C-BE08-514DB17B7324}"/>
-          </ac:spMkLst>
-        </pc:spChg>
-        <pc:spChg chg="mod">
-          <ac:chgData name="Tommaso Ghilardi (Staff)" userId="b9591c49-3913-47aa-a516-44e0ea4248a4" providerId="ADAL" clId="{DFF45E3B-A62A-4CBF-971A-719412A1D47F}" dt="2025-08-30T17:20:29.927" v="188"/>
-          <ac:spMkLst>
-            <pc:docMk/>
-            <pc:sldMk cId="3385753680" sldId="260"/>
-            <ac:spMk id="165" creationId="{E18E0C6C-DF41-F5BB-E99B-07D7F78A9468}"/>
-          </ac:spMkLst>
-        </pc:spChg>
-        <pc:spChg chg="mod">
-          <ac:chgData name="Tommaso Ghilardi (Staff)" userId="b9591c49-3913-47aa-a516-44e0ea4248a4" providerId="ADAL" clId="{DFF45E3B-A62A-4CBF-971A-719412A1D47F}" dt="2025-08-30T17:21:04.331" v="189"/>
-          <ac:spMkLst>
-            <pc:docMk/>
-            <pc:sldMk cId="3385753680" sldId="260"/>
-            <ac:spMk id="167" creationId="{2C358D5C-84DC-E6F3-6072-A454B4A6F02C}"/>
-          </ac:spMkLst>
-        </pc:spChg>
-        <pc:spChg chg="mod">
-          <ac:chgData name="Tommaso Ghilardi (Staff)" userId="b9591c49-3913-47aa-a516-44e0ea4248a4" providerId="ADAL" clId="{DFF45E3B-A62A-4CBF-971A-719412A1D47F}" dt="2025-08-30T17:21:38.490" v="190"/>
-          <ac:spMkLst>
-            <pc:docMk/>
-            <pc:sldMk cId="3385753680" sldId="260"/>
-            <ac:spMk id="194" creationId="{1C5F7E85-B3CC-DDA0-268F-F46D484256DC}"/>
-          </ac:spMkLst>
-        </pc:spChg>
-        <pc:spChg chg="mod">
-          <ac:chgData name="Tommaso Ghilardi (Staff)" userId="b9591c49-3913-47aa-a516-44e0ea4248a4" providerId="ADAL" clId="{DFF45E3B-A62A-4CBF-971A-719412A1D47F}" dt="2025-08-29T17:09:02.087" v="99"/>
-          <ac:spMkLst>
-            <pc:docMk/>
-            <pc:sldMk cId="3385753680" sldId="260"/>
-            <ac:spMk id="196" creationId="{131AD033-4BF6-2CB9-2B20-6BCC9C88031E}"/>
-          </ac:spMkLst>
-        </pc:spChg>
-        <pc:spChg chg="mod">
-          <ac:chgData name="Tommaso Ghilardi (Staff)" userId="b9591c49-3913-47aa-a516-44e0ea4248a4" providerId="ADAL" clId="{DFF45E3B-A62A-4CBF-971A-719412A1D47F}" dt="2025-08-29T17:09:18.280" v="140" actId="1036"/>
-          <ac:spMkLst>
-            <pc:docMk/>
-            <pc:sldMk cId="3385753680" sldId="260"/>
-            <ac:spMk id="239" creationId="{C7B4A8E9-48E6-E56C-94AA-335BCD028649}"/>
-          </ac:spMkLst>
-        </pc:spChg>
-        <pc:spChg chg="mod">
-          <ac:chgData name="Tommaso Ghilardi (Staff)" userId="b9591c49-3913-47aa-a516-44e0ea4248a4" providerId="ADAL" clId="{DFF45E3B-A62A-4CBF-971A-719412A1D47F}" dt="2025-08-29T17:09:18.280" v="140" actId="1036"/>
-          <ac:spMkLst>
-            <pc:docMk/>
-            <pc:sldMk cId="3385753680" sldId="260"/>
-            <ac:spMk id="330" creationId="{06E73439-4535-5659-0077-DCB1656E74B8}"/>
-          </ac:spMkLst>
-        </pc:spChg>
-        <pc:spChg chg="mod">
-          <ac:chgData name="Tommaso Ghilardi (Staff)" userId="b9591c49-3913-47aa-a516-44e0ea4248a4" providerId="ADAL" clId="{DFF45E3B-A62A-4CBF-971A-719412A1D47F}" dt="2025-08-30T21:22:19.347" v="194"/>
-          <ac:spMkLst>
-            <pc:docMk/>
-            <pc:sldMk cId="3385753680" sldId="260"/>
-            <ac:spMk id="346" creationId="{6809C222-3E55-5E9F-E93B-09A77EF2B877}"/>
-          </ac:spMkLst>
-        </pc:spChg>
-        <pc:spChg chg="mod">
-          <ac:chgData name="Tommaso Ghilardi (Staff)" userId="b9591c49-3913-47aa-a516-44e0ea4248a4" providerId="ADAL" clId="{DFF45E3B-A62A-4CBF-971A-719412A1D47F}" dt="2025-08-30T21:35:08.422" v="224" actId="1036"/>
-          <ac:spMkLst>
-            <pc:docMk/>
-            <pc:sldMk cId="3385753680" sldId="260"/>
-            <ac:spMk id="351" creationId="{6EA7600C-6C54-3105-A18C-9017A16B3D21}"/>
-          </ac:spMkLst>
-        </pc:spChg>
-        <pc:spChg chg="mod">
-          <ac:chgData name="Tommaso Ghilardi (Staff)" userId="b9591c49-3913-47aa-a516-44e0ea4248a4" providerId="ADAL" clId="{DFF45E3B-A62A-4CBF-971A-719412A1D47F}" dt="2025-08-30T21:36:14.512" v="246"/>
-          <ac:spMkLst>
-            <pc:docMk/>
-            <pc:sldMk cId="3385753680" sldId="260"/>
-            <ac:spMk id="363" creationId="{9319AFEF-4A5B-08F3-5D86-49BC1B2B3E0B}"/>
-          </ac:spMkLst>
-        </pc:spChg>
-        <pc:spChg chg="mod">
-          <ac:chgData name="Tommaso Ghilardi (Staff)" userId="b9591c49-3913-47aa-a516-44e0ea4248a4" providerId="ADAL" clId="{DFF45E3B-A62A-4CBF-971A-719412A1D47F}" dt="2025-08-29T17:09:02.087" v="99"/>
-          <ac:spMkLst>
-            <pc:docMk/>
-            <pc:sldMk cId="3385753680" sldId="260"/>
-            <ac:spMk id="417" creationId="{C673FA4E-BE89-1311-DCFA-DAD53A6CE2E9}"/>
-          </ac:spMkLst>
-        </pc:spChg>
-        <pc:picChg chg="add mod">
-          <ac:chgData name="Tommaso Ghilardi (Staff)" userId="b9591c49-3913-47aa-a516-44e0ea4248a4" providerId="ADAL" clId="{DFF45E3B-A62A-4CBF-971A-719412A1D47F}" dt="2025-08-29T17:11:22.275" v="146" actId="14100"/>
-          <ac:picMkLst>
-            <pc:docMk/>
-            <pc:sldMk cId="3385753680" sldId="260"/>
-            <ac:picMk id="2" creationId="{510D4F49-67E6-7A81-73C6-E90C97528BA6}"/>
-          </ac:picMkLst>
-        </pc:picChg>
-        <pc:picChg chg="add mod">
-          <ac:chgData name="Tommaso Ghilardi (Staff)" userId="b9591c49-3913-47aa-a516-44e0ea4248a4" providerId="ADAL" clId="{DFF45E3B-A62A-4CBF-971A-719412A1D47F}" dt="2025-08-29T17:11:22.275" v="146" actId="14100"/>
-          <ac:picMkLst>
-            <pc:docMk/>
-            <pc:sldMk cId="3385753680" sldId="260"/>
-            <ac:picMk id="3" creationId="{CE80F48C-C12C-CEC1-37A4-94012B201F13}"/>
-          </ac:picMkLst>
-        </pc:picChg>
-        <pc:picChg chg="add del mod">
-          <ac:chgData name="Tommaso Ghilardi (Staff)" userId="b9591c49-3913-47aa-a516-44e0ea4248a4" providerId="ADAL" clId="{DFF45E3B-A62A-4CBF-971A-719412A1D47F}" dt="2025-08-29T17:11:42.737" v="149" actId="478"/>
-          <ac:picMkLst>
-            <pc:docMk/>
-            <pc:sldMk cId="3385753680" sldId="260"/>
-            <ac:picMk id="4" creationId="{9A08A4BA-CBF9-16EB-2CA4-7B920A2091FA}"/>
-          </ac:picMkLst>
-        </pc:picChg>
-        <pc:picChg chg="add mod">
-          <ac:chgData name="Tommaso Ghilardi (Staff)" userId="b9591c49-3913-47aa-a516-44e0ea4248a4" providerId="ADAL" clId="{DFF45E3B-A62A-4CBF-971A-719412A1D47F}" dt="2025-08-29T17:12:07.619" v="155" actId="1076"/>
-          <ac:picMkLst>
-            <pc:docMk/>
-            <pc:sldMk cId="3385753680" sldId="260"/>
-            <ac:picMk id="5" creationId="{3F3E82E3-8599-AAE1-77BA-620255105750}"/>
-          </ac:picMkLst>
-        </pc:picChg>
-        <pc:picChg chg="add mod">
-          <ac:chgData name="Tommaso Ghilardi (Staff)" userId="b9591c49-3913-47aa-a516-44e0ea4248a4" providerId="ADAL" clId="{DFF45E3B-A62A-4CBF-971A-719412A1D47F}" dt="2025-08-30T21:35:41.456" v="245" actId="1076"/>
-          <ac:picMkLst>
-            <pc:docMk/>
-            <pc:sldMk cId="3385753680" sldId="260"/>
-            <ac:picMk id="7" creationId="{4DAD83B5-9646-25AF-6960-3BEE4CA9E6F7}"/>
-          </ac:picMkLst>
-        </pc:picChg>
-        <pc:picChg chg="add del mod">
-          <ac:chgData name="Tommaso Ghilardi (Staff)" userId="b9591c49-3913-47aa-a516-44e0ea4248a4" providerId="ADAL" clId="{DFF45E3B-A62A-4CBF-971A-719412A1D47F}" dt="2025-08-30T11:47:51.751" v="171" actId="478"/>
-          <ac:picMkLst>
-            <pc:docMk/>
-            <pc:sldMk cId="3385753680" sldId="260"/>
-            <ac:picMk id="8" creationId="{100CA0FC-3133-ACDE-C201-31EC84B56DAE}"/>
-          </ac:picMkLst>
-        </pc:picChg>
-        <pc:picChg chg="add mod">
-          <ac:chgData name="Tommaso Ghilardi (Staff)" userId="b9591c49-3913-47aa-a516-44e0ea4248a4" providerId="ADAL" clId="{DFF45E3B-A62A-4CBF-971A-719412A1D47F}" dt="2025-08-30T11:48:04.292" v="177" actId="14100"/>
-          <ac:picMkLst>
-            <pc:docMk/>
-            <pc:sldMk cId="3385753680" sldId="260"/>
-            <ac:picMk id="9" creationId="{96B7E7CF-8B07-A18A-4BA8-EFE88E7368B5}"/>
-          </ac:picMkLst>
-        </pc:picChg>
-        <pc:picChg chg="add mod">
-          <ac:chgData name="Tommaso Ghilardi (Staff)" userId="b9591c49-3913-47aa-a516-44e0ea4248a4" providerId="ADAL" clId="{DFF45E3B-A62A-4CBF-971A-719412A1D47F}" dt="2025-08-30T11:48:23.263" v="178"/>
-          <ac:picMkLst>
-            <pc:docMk/>
-            <pc:sldMk cId="3385753680" sldId="260"/>
-            <ac:picMk id="17" creationId="{376F0966-6CBE-4396-A4E4-12D8B4A3D04D}"/>
-          </ac:picMkLst>
-        </pc:picChg>
-        <pc:picChg chg="del">
-          <ac:chgData name="Tommaso Ghilardi (Staff)" userId="b9591c49-3913-47aa-a516-44e0ea4248a4" providerId="ADAL" clId="{DFF45E3B-A62A-4CBF-971A-719412A1D47F}" dt="2025-08-29T17:06:43.459" v="1" actId="478"/>
-          <ac:picMkLst>
-            <pc:docMk/>
-            <pc:sldMk cId="3385753680" sldId="260"/>
-            <ac:picMk id="19" creationId="{45B16BE1-8A16-4D4A-9731-47F08D9DB3F1}"/>
-          </ac:picMkLst>
-        </pc:picChg>
-        <pc:picChg chg="add mod">
-          <ac:chgData name="Tommaso Ghilardi (Staff)" userId="b9591c49-3913-47aa-a516-44e0ea4248a4" providerId="ADAL" clId="{DFF45E3B-A62A-4CBF-971A-719412A1D47F}" dt="2025-08-30T11:48:33.302" v="179"/>
-          <ac:picMkLst>
-            <pc:docMk/>
-            <pc:sldMk cId="3385753680" sldId="260"/>
-            <ac:picMk id="19" creationId="{DA8A1A7E-2E96-FA94-15E4-CE1E618A9EE5}"/>
-          </ac:picMkLst>
-        </pc:picChg>
-        <pc:picChg chg="add mod">
-          <ac:chgData name="Tommaso Ghilardi (Staff)" userId="b9591c49-3913-47aa-a516-44e0ea4248a4" providerId="ADAL" clId="{DFF45E3B-A62A-4CBF-971A-719412A1D47F}" dt="2025-08-30T11:49:22.930" v="187" actId="14100"/>
-          <ac:picMkLst>
-            <pc:docMk/>
-            <pc:sldMk cId="3385753680" sldId="260"/>
-            <ac:picMk id="21" creationId="{D1E95A78-6C5B-D428-4180-08ADCAFE130F}"/>
-          </ac:picMkLst>
-        </pc:picChg>
-        <pc:cxnChg chg="add mod">
-          <ac:chgData name="Tommaso Ghilardi (Staff)" userId="b9591c49-3913-47aa-a516-44e0ea4248a4" providerId="ADAL" clId="{DFF45E3B-A62A-4CBF-971A-719412A1D47F}" dt="2025-08-30T21:35:32.421" v="244" actId="552"/>
-          <ac:cxnSpMkLst>
-            <pc:docMk/>
-            <pc:sldMk cId="3385753680" sldId="260"/>
-            <ac:cxnSpMk id="17" creationId="{7E6F76A3-3F0C-A1D1-2840-9F9943EB9F59}"/>
-          </ac:cxnSpMkLst>
-        </pc:cxnChg>
-        <pc:cxnChg chg="add mod">
-          <ac:chgData name="Tommaso Ghilardi (Staff)" userId="b9591c49-3913-47aa-a516-44e0ea4248a4" providerId="ADAL" clId="{DFF45E3B-A62A-4CBF-971A-719412A1D47F}" dt="2025-08-30T21:35:32.421" v="244" actId="552"/>
-          <ac:cxnSpMkLst>
-            <pc:docMk/>
-            <pc:sldMk cId="3385753680" sldId="260"/>
-            <ac:cxnSpMk id="20" creationId="{65240A74-6601-A7CA-DF3D-DCB7B9387521}"/>
-          </ac:cxnSpMkLst>
-        </pc:cxnChg>
-        <pc:cxnChg chg="add mod">
-          <ac:chgData name="Tommaso Ghilardi (Staff)" userId="b9591c49-3913-47aa-a516-44e0ea4248a4" providerId="ADAL" clId="{DFF45E3B-A62A-4CBF-971A-719412A1D47F}" dt="2025-08-30T21:35:32.421" v="244" actId="552"/>
-          <ac:cxnSpMkLst>
-            <pc:docMk/>
-            <pc:sldMk cId="3385753680" sldId="260"/>
-            <ac:cxnSpMk id="30" creationId="{BF3FB601-D252-03CF-D2BC-35CB905FA5B7}"/>
-          </ac:cxnSpMkLst>
-        </pc:cxnChg>
-        <pc:cxnChg chg="add mod">
-          <ac:chgData name="Tommaso Ghilardi (Staff)" userId="b9591c49-3913-47aa-a516-44e0ea4248a4" providerId="ADAL" clId="{DFF45E3B-A62A-4CBF-971A-719412A1D47F}" dt="2025-08-30T21:35:32.421" v="244" actId="552"/>
-          <ac:cxnSpMkLst>
-            <pc:docMk/>
-            <pc:sldMk cId="3385753680" sldId="260"/>
-            <ac:cxnSpMk id="34" creationId="{BBAFEA95-8F0C-F2FA-793F-AC7472E78511}"/>
-          </ac:cxnSpMkLst>
-        </pc:cxnChg>
-        <pc:cxnChg chg="mod">
-          <ac:chgData name="Tommaso Ghilardi (Staff)" userId="b9591c49-3913-47aa-a516-44e0ea4248a4" providerId="ADAL" clId="{DFF45E3B-A62A-4CBF-971A-719412A1D47F}" dt="2025-08-30T21:35:08.422" v="224" actId="1036"/>
-          <ac:cxnSpMkLst>
-            <pc:docMk/>
-            <pc:sldMk cId="3385753680" sldId="260"/>
-            <ac:cxnSpMk id="42" creationId="{C00EAA6A-967F-B7BB-A566-B570DBCA4121}"/>
-          </ac:cxnSpMkLst>
-        </pc:cxnChg>
-        <pc:cxnChg chg="del mod">
-          <ac:chgData name="Tommaso Ghilardi (Staff)" userId="b9591c49-3913-47aa-a516-44e0ea4248a4" providerId="ADAL" clId="{DFF45E3B-A62A-4CBF-971A-719412A1D47F}" dt="2025-08-30T21:33:33.655" v="200" actId="478"/>
-          <ac:cxnSpMkLst>
-            <pc:docMk/>
-            <pc:sldMk cId="3385753680" sldId="260"/>
-            <ac:cxnSpMk id="44" creationId="{2836FF54-7FB5-3244-0498-FA1DACEB38DF}"/>
-          </ac:cxnSpMkLst>
-        </pc:cxnChg>
-        <pc:cxnChg chg="mod">
-          <ac:chgData name="Tommaso Ghilardi (Staff)" userId="b9591c49-3913-47aa-a516-44e0ea4248a4" providerId="ADAL" clId="{DFF45E3B-A62A-4CBF-971A-719412A1D47F}" dt="2025-08-30T21:35:08.422" v="224" actId="1036"/>
-          <ac:cxnSpMkLst>
-            <pc:docMk/>
-            <pc:sldMk cId="3385753680" sldId="260"/>
-            <ac:cxnSpMk id="47" creationId="{4A3CC929-CA90-82AB-8D75-D1AB63940ECD}"/>
-          </ac:cxnSpMkLst>
-        </pc:cxnChg>
-        <pc:cxnChg chg="mod">
-          <ac:chgData name="Tommaso Ghilardi (Staff)" userId="b9591c49-3913-47aa-a516-44e0ea4248a4" providerId="ADAL" clId="{DFF45E3B-A62A-4CBF-971A-719412A1D47F}" dt="2025-08-30T21:35:08.422" v="224" actId="1036"/>
-          <ac:cxnSpMkLst>
-            <pc:docMk/>
-            <pc:sldMk cId="3385753680" sldId="260"/>
-            <ac:cxnSpMk id="111" creationId="{8B1D3DBF-AFA1-3F17-A964-7072F2A83972}"/>
-          </ac:cxnSpMkLst>
-        </pc:cxnChg>
-        <pc:cxnChg chg="del mod">
-          <ac:chgData name="Tommaso Ghilardi (Staff)" userId="b9591c49-3913-47aa-a516-44e0ea4248a4" providerId="ADAL" clId="{DFF45E3B-A62A-4CBF-971A-719412A1D47F}" dt="2025-08-30T21:33:07.856" v="198" actId="478"/>
-          <ac:cxnSpMkLst>
-            <pc:docMk/>
-            <pc:sldMk cId="3385753680" sldId="260"/>
-            <ac:cxnSpMk id="352" creationId="{CB6E61C5-BC83-A3BD-C4DB-BAC64DD46273}"/>
-          </ac:cxnSpMkLst>
-        </pc:cxnChg>
       </pc:sldChg>
       <pc:sldMasterChg chg="modSp modSldLayout">
         <pc:chgData name="Tommaso Ghilardi (Staff)" userId="b9591c49-3913-47aa-a516-44e0ea4248a4" providerId="ADAL" clId="{DFF45E3B-A62A-4CBF-971A-719412A1D47F}" dt="2025-08-29T17:09:02.087" v="99"/>
@@ -1159,46 +391,6 @@
           <pc:docMk/>
           <pc:sldMasterMk cId="1786956075" sldId="2147483732"/>
         </pc:sldMasterMkLst>
-        <pc:spChg chg="mod">
-          <ac:chgData name="Tommaso Ghilardi (Staff)" userId="b9591c49-3913-47aa-a516-44e0ea4248a4" providerId="ADAL" clId="{DFF45E3B-A62A-4CBF-971A-719412A1D47F}" dt="2025-08-29T17:09:02.087" v="99"/>
-          <ac:spMkLst>
-            <pc:docMk/>
-            <pc:sldMasterMk cId="1786956075" sldId="2147483732"/>
-            <ac:spMk id="2" creationId="{00000000-0000-0000-0000-000000000000}"/>
-          </ac:spMkLst>
-        </pc:spChg>
-        <pc:spChg chg="mod">
-          <ac:chgData name="Tommaso Ghilardi (Staff)" userId="b9591c49-3913-47aa-a516-44e0ea4248a4" providerId="ADAL" clId="{DFF45E3B-A62A-4CBF-971A-719412A1D47F}" dt="2025-08-29T17:09:02.087" v="99"/>
-          <ac:spMkLst>
-            <pc:docMk/>
-            <pc:sldMasterMk cId="1786956075" sldId="2147483732"/>
-            <ac:spMk id="3" creationId="{00000000-0000-0000-0000-000000000000}"/>
-          </ac:spMkLst>
-        </pc:spChg>
-        <pc:spChg chg="mod">
-          <ac:chgData name="Tommaso Ghilardi (Staff)" userId="b9591c49-3913-47aa-a516-44e0ea4248a4" providerId="ADAL" clId="{DFF45E3B-A62A-4CBF-971A-719412A1D47F}" dt="2025-08-29T17:09:02.087" v="99"/>
-          <ac:spMkLst>
-            <pc:docMk/>
-            <pc:sldMasterMk cId="1786956075" sldId="2147483732"/>
-            <ac:spMk id="4" creationId="{00000000-0000-0000-0000-000000000000}"/>
-          </ac:spMkLst>
-        </pc:spChg>
-        <pc:spChg chg="mod">
-          <ac:chgData name="Tommaso Ghilardi (Staff)" userId="b9591c49-3913-47aa-a516-44e0ea4248a4" providerId="ADAL" clId="{DFF45E3B-A62A-4CBF-971A-719412A1D47F}" dt="2025-08-29T17:09:02.087" v="99"/>
-          <ac:spMkLst>
-            <pc:docMk/>
-            <pc:sldMasterMk cId="1786956075" sldId="2147483732"/>
-            <ac:spMk id="5" creationId="{00000000-0000-0000-0000-000000000000}"/>
-          </ac:spMkLst>
-        </pc:spChg>
-        <pc:spChg chg="mod">
-          <ac:chgData name="Tommaso Ghilardi (Staff)" userId="b9591c49-3913-47aa-a516-44e0ea4248a4" providerId="ADAL" clId="{DFF45E3B-A62A-4CBF-971A-719412A1D47F}" dt="2025-08-29T17:09:02.087" v="99"/>
-          <ac:spMkLst>
-            <pc:docMk/>
-            <pc:sldMasterMk cId="1786956075" sldId="2147483732"/>
-            <ac:spMk id="6" creationId="{00000000-0000-0000-0000-000000000000}"/>
-          </ac:spMkLst>
-        </pc:spChg>
         <pc:sldLayoutChg chg="modSp">
           <pc:chgData name="Tommaso Ghilardi (Staff)" userId="b9591c49-3913-47aa-a516-44e0ea4248a4" providerId="ADAL" clId="{DFF45E3B-A62A-4CBF-971A-719412A1D47F}" dt="2025-08-29T17:09:02.087" v="99"/>
           <pc:sldLayoutMkLst>
@@ -1206,24 +398,6 @@
             <pc:sldMasterMk cId="1786956075" sldId="2147483732"/>
             <pc:sldLayoutMk cId="3397466787" sldId="2147483733"/>
           </pc:sldLayoutMkLst>
-          <pc:spChg chg="mod">
-            <ac:chgData name="Tommaso Ghilardi (Staff)" userId="b9591c49-3913-47aa-a516-44e0ea4248a4" providerId="ADAL" clId="{DFF45E3B-A62A-4CBF-971A-719412A1D47F}" dt="2025-08-29T17:09:02.087" v="99"/>
-            <ac:spMkLst>
-              <pc:docMk/>
-              <pc:sldMasterMk cId="1786956075" sldId="2147483732"/>
-              <pc:sldLayoutMk cId="3397466787" sldId="2147483733"/>
-              <ac:spMk id="2" creationId="{00000000-0000-0000-0000-000000000000}"/>
-            </ac:spMkLst>
-          </pc:spChg>
-          <pc:spChg chg="mod">
-            <ac:chgData name="Tommaso Ghilardi (Staff)" userId="b9591c49-3913-47aa-a516-44e0ea4248a4" providerId="ADAL" clId="{DFF45E3B-A62A-4CBF-971A-719412A1D47F}" dt="2025-08-29T17:09:02.087" v="99"/>
-            <ac:spMkLst>
-              <pc:docMk/>
-              <pc:sldMasterMk cId="1786956075" sldId="2147483732"/>
-              <pc:sldLayoutMk cId="3397466787" sldId="2147483733"/>
-              <ac:spMk id="3" creationId="{00000000-0000-0000-0000-000000000000}"/>
-            </ac:spMkLst>
-          </pc:spChg>
         </pc:sldLayoutChg>
         <pc:sldLayoutChg chg="modSp">
           <pc:chgData name="Tommaso Ghilardi (Staff)" userId="b9591c49-3913-47aa-a516-44e0ea4248a4" providerId="ADAL" clId="{DFF45E3B-A62A-4CBF-971A-719412A1D47F}" dt="2025-08-29T17:09:02.087" v="99"/>
@@ -1232,24 +406,6 @@
             <pc:sldMasterMk cId="1786956075" sldId="2147483732"/>
             <pc:sldLayoutMk cId="1388463586" sldId="2147483735"/>
           </pc:sldLayoutMkLst>
-          <pc:spChg chg="mod">
-            <ac:chgData name="Tommaso Ghilardi (Staff)" userId="b9591c49-3913-47aa-a516-44e0ea4248a4" providerId="ADAL" clId="{DFF45E3B-A62A-4CBF-971A-719412A1D47F}" dt="2025-08-29T17:09:02.087" v="99"/>
-            <ac:spMkLst>
-              <pc:docMk/>
-              <pc:sldMasterMk cId="1786956075" sldId="2147483732"/>
-              <pc:sldLayoutMk cId="1388463586" sldId="2147483735"/>
-              <ac:spMk id="2" creationId="{00000000-0000-0000-0000-000000000000}"/>
-            </ac:spMkLst>
-          </pc:spChg>
-          <pc:spChg chg="mod">
-            <ac:chgData name="Tommaso Ghilardi (Staff)" userId="b9591c49-3913-47aa-a516-44e0ea4248a4" providerId="ADAL" clId="{DFF45E3B-A62A-4CBF-971A-719412A1D47F}" dt="2025-08-29T17:09:02.087" v="99"/>
-            <ac:spMkLst>
-              <pc:docMk/>
-              <pc:sldMasterMk cId="1786956075" sldId="2147483732"/>
-              <pc:sldLayoutMk cId="1388463586" sldId="2147483735"/>
-              <ac:spMk id="3" creationId="{00000000-0000-0000-0000-000000000000}"/>
-            </ac:spMkLst>
-          </pc:spChg>
         </pc:sldLayoutChg>
         <pc:sldLayoutChg chg="modSp">
           <pc:chgData name="Tommaso Ghilardi (Staff)" userId="b9591c49-3913-47aa-a516-44e0ea4248a4" providerId="ADAL" clId="{DFF45E3B-A62A-4CBF-971A-719412A1D47F}" dt="2025-08-29T17:09:02.087" v="99"/>
@@ -1258,24 +414,6 @@
             <pc:sldMasterMk cId="1786956075" sldId="2147483732"/>
             <pc:sldLayoutMk cId="4058901221" sldId="2147483736"/>
           </pc:sldLayoutMkLst>
-          <pc:spChg chg="mod">
-            <ac:chgData name="Tommaso Ghilardi (Staff)" userId="b9591c49-3913-47aa-a516-44e0ea4248a4" providerId="ADAL" clId="{DFF45E3B-A62A-4CBF-971A-719412A1D47F}" dt="2025-08-29T17:09:02.087" v="99"/>
-            <ac:spMkLst>
-              <pc:docMk/>
-              <pc:sldMasterMk cId="1786956075" sldId="2147483732"/>
-              <pc:sldLayoutMk cId="4058901221" sldId="2147483736"/>
-              <ac:spMk id="3" creationId="{00000000-0000-0000-0000-000000000000}"/>
-            </ac:spMkLst>
-          </pc:spChg>
-          <pc:spChg chg="mod">
-            <ac:chgData name="Tommaso Ghilardi (Staff)" userId="b9591c49-3913-47aa-a516-44e0ea4248a4" providerId="ADAL" clId="{DFF45E3B-A62A-4CBF-971A-719412A1D47F}" dt="2025-08-29T17:09:02.087" v="99"/>
-            <ac:spMkLst>
-              <pc:docMk/>
-              <pc:sldMasterMk cId="1786956075" sldId="2147483732"/>
-              <pc:sldLayoutMk cId="4058901221" sldId="2147483736"/>
-              <ac:spMk id="4" creationId="{00000000-0000-0000-0000-000000000000}"/>
-            </ac:spMkLst>
-          </pc:spChg>
         </pc:sldLayoutChg>
         <pc:sldLayoutChg chg="modSp">
           <pc:chgData name="Tommaso Ghilardi (Staff)" userId="b9591c49-3913-47aa-a516-44e0ea4248a4" providerId="ADAL" clId="{DFF45E3B-A62A-4CBF-971A-719412A1D47F}" dt="2025-08-29T17:09:02.087" v="99"/>
@@ -1284,51 +422,6 @@
             <pc:sldMasterMk cId="1786956075" sldId="2147483732"/>
             <pc:sldLayoutMk cId="2797219153" sldId="2147483737"/>
           </pc:sldLayoutMkLst>
-          <pc:spChg chg="mod">
-            <ac:chgData name="Tommaso Ghilardi (Staff)" userId="b9591c49-3913-47aa-a516-44e0ea4248a4" providerId="ADAL" clId="{DFF45E3B-A62A-4CBF-971A-719412A1D47F}" dt="2025-08-29T17:09:02.087" v="99"/>
-            <ac:spMkLst>
-              <pc:docMk/>
-              <pc:sldMasterMk cId="1786956075" sldId="2147483732"/>
-              <pc:sldLayoutMk cId="2797219153" sldId="2147483737"/>
-              <ac:spMk id="2" creationId="{00000000-0000-0000-0000-000000000000}"/>
-            </ac:spMkLst>
-          </pc:spChg>
-          <pc:spChg chg="mod">
-            <ac:chgData name="Tommaso Ghilardi (Staff)" userId="b9591c49-3913-47aa-a516-44e0ea4248a4" providerId="ADAL" clId="{DFF45E3B-A62A-4CBF-971A-719412A1D47F}" dt="2025-08-29T17:09:02.087" v="99"/>
-            <ac:spMkLst>
-              <pc:docMk/>
-              <pc:sldMasterMk cId="1786956075" sldId="2147483732"/>
-              <pc:sldLayoutMk cId="2797219153" sldId="2147483737"/>
-              <ac:spMk id="3" creationId="{00000000-0000-0000-0000-000000000000}"/>
-            </ac:spMkLst>
-          </pc:spChg>
-          <pc:spChg chg="mod">
-            <ac:chgData name="Tommaso Ghilardi (Staff)" userId="b9591c49-3913-47aa-a516-44e0ea4248a4" providerId="ADAL" clId="{DFF45E3B-A62A-4CBF-971A-719412A1D47F}" dt="2025-08-29T17:09:02.087" v="99"/>
-            <ac:spMkLst>
-              <pc:docMk/>
-              <pc:sldMasterMk cId="1786956075" sldId="2147483732"/>
-              <pc:sldLayoutMk cId="2797219153" sldId="2147483737"/>
-              <ac:spMk id="4" creationId="{00000000-0000-0000-0000-000000000000}"/>
-            </ac:spMkLst>
-          </pc:spChg>
-          <pc:spChg chg="mod">
-            <ac:chgData name="Tommaso Ghilardi (Staff)" userId="b9591c49-3913-47aa-a516-44e0ea4248a4" providerId="ADAL" clId="{DFF45E3B-A62A-4CBF-971A-719412A1D47F}" dt="2025-08-29T17:09:02.087" v="99"/>
-            <ac:spMkLst>
-              <pc:docMk/>
-              <pc:sldMasterMk cId="1786956075" sldId="2147483732"/>
-              <pc:sldLayoutMk cId="2797219153" sldId="2147483737"/>
-              <ac:spMk id="5" creationId="{00000000-0000-0000-0000-000000000000}"/>
-            </ac:spMkLst>
-          </pc:spChg>
-          <pc:spChg chg="mod">
-            <ac:chgData name="Tommaso Ghilardi (Staff)" userId="b9591c49-3913-47aa-a516-44e0ea4248a4" providerId="ADAL" clId="{DFF45E3B-A62A-4CBF-971A-719412A1D47F}" dt="2025-08-29T17:09:02.087" v="99"/>
-            <ac:spMkLst>
-              <pc:docMk/>
-              <pc:sldMasterMk cId="1786956075" sldId="2147483732"/>
-              <pc:sldLayoutMk cId="2797219153" sldId="2147483737"/>
-              <ac:spMk id="6" creationId="{00000000-0000-0000-0000-000000000000}"/>
-            </ac:spMkLst>
-          </pc:spChg>
         </pc:sldLayoutChg>
         <pc:sldLayoutChg chg="modSp">
           <pc:chgData name="Tommaso Ghilardi (Staff)" userId="b9591c49-3913-47aa-a516-44e0ea4248a4" providerId="ADAL" clId="{DFF45E3B-A62A-4CBF-971A-719412A1D47F}" dt="2025-08-29T17:09:02.087" v="99"/>
@@ -1337,33 +430,6 @@
             <pc:sldMasterMk cId="1786956075" sldId="2147483732"/>
             <pc:sldLayoutMk cId="2744220517" sldId="2147483740"/>
           </pc:sldLayoutMkLst>
-          <pc:spChg chg="mod">
-            <ac:chgData name="Tommaso Ghilardi (Staff)" userId="b9591c49-3913-47aa-a516-44e0ea4248a4" providerId="ADAL" clId="{DFF45E3B-A62A-4CBF-971A-719412A1D47F}" dt="2025-08-29T17:09:02.087" v="99"/>
-            <ac:spMkLst>
-              <pc:docMk/>
-              <pc:sldMasterMk cId="1786956075" sldId="2147483732"/>
-              <pc:sldLayoutMk cId="2744220517" sldId="2147483740"/>
-              <ac:spMk id="2" creationId="{00000000-0000-0000-0000-000000000000}"/>
-            </ac:spMkLst>
-          </pc:spChg>
-          <pc:spChg chg="mod">
-            <ac:chgData name="Tommaso Ghilardi (Staff)" userId="b9591c49-3913-47aa-a516-44e0ea4248a4" providerId="ADAL" clId="{DFF45E3B-A62A-4CBF-971A-719412A1D47F}" dt="2025-08-29T17:09:02.087" v="99"/>
-            <ac:spMkLst>
-              <pc:docMk/>
-              <pc:sldMasterMk cId="1786956075" sldId="2147483732"/>
-              <pc:sldLayoutMk cId="2744220517" sldId="2147483740"/>
-              <ac:spMk id="3" creationId="{00000000-0000-0000-0000-000000000000}"/>
-            </ac:spMkLst>
-          </pc:spChg>
-          <pc:spChg chg="mod">
-            <ac:chgData name="Tommaso Ghilardi (Staff)" userId="b9591c49-3913-47aa-a516-44e0ea4248a4" providerId="ADAL" clId="{DFF45E3B-A62A-4CBF-971A-719412A1D47F}" dt="2025-08-29T17:09:02.087" v="99"/>
-            <ac:spMkLst>
-              <pc:docMk/>
-              <pc:sldMasterMk cId="1786956075" sldId="2147483732"/>
-              <pc:sldLayoutMk cId="2744220517" sldId="2147483740"/>
-              <ac:spMk id="4" creationId="{00000000-0000-0000-0000-000000000000}"/>
-            </ac:spMkLst>
-          </pc:spChg>
         </pc:sldLayoutChg>
         <pc:sldLayoutChg chg="modSp">
           <pc:chgData name="Tommaso Ghilardi (Staff)" userId="b9591c49-3913-47aa-a516-44e0ea4248a4" providerId="ADAL" clId="{DFF45E3B-A62A-4CBF-971A-719412A1D47F}" dt="2025-08-29T17:09:02.087" v="99"/>
@@ -1372,33 +438,6 @@
             <pc:sldMasterMk cId="1786956075" sldId="2147483732"/>
             <pc:sldLayoutMk cId="3653992267" sldId="2147483741"/>
           </pc:sldLayoutMkLst>
-          <pc:spChg chg="mod">
-            <ac:chgData name="Tommaso Ghilardi (Staff)" userId="b9591c49-3913-47aa-a516-44e0ea4248a4" providerId="ADAL" clId="{DFF45E3B-A62A-4CBF-971A-719412A1D47F}" dt="2025-08-29T17:09:02.087" v="99"/>
-            <ac:spMkLst>
-              <pc:docMk/>
-              <pc:sldMasterMk cId="1786956075" sldId="2147483732"/>
-              <pc:sldLayoutMk cId="3653992267" sldId="2147483741"/>
-              <ac:spMk id="2" creationId="{00000000-0000-0000-0000-000000000000}"/>
-            </ac:spMkLst>
-          </pc:spChg>
-          <pc:spChg chg="mod">
-            <ac:chgData name="Tommaso Ghilardi (Staff)" userId="b9591c49-3913-47aa-a516-44e0ea4248a4" providerId="ADAL" clId="{DFF45E3B-A62A-4CBF-971A-719412A1D47F}" dt="2025-08-29T17:09:02.087" v="99"/>
-            <ac:spMkLst>
-              <pc:docMk/>
-              <pc:sldMasterMk cId="1786956075" sldId="2147483732"/>
-              <pc:sldLayoutMk cId="3653992267" sldId="2147483741"/>
-              <ac:spMk id="3" creationId="{00000000-0000-0000-0000-000000000000}"/>
-            </ac:spMkLst>
-          </pc:spChg>
-          <pc:spChg chg="mod">
-            <ac:chgData name="Tommaso Ghilardi (Staff)" userId="b9591c49-3913-47aa-a516-44e0ea4248a4" providerId="ADAL" clId="{DFF45E3B-A62A-4CBF-971A-719412A1D47F}" dt="2025-08-29T17:09:02.087" v="99"/>
-            <ac:spMkLst>
-              <pc:docMk/>
-              <pc:sldMasterMk cId="1786956075" sldId="2147483732"/>
-              <pc:sldLayoutMk cId="3653992267" sldId="2147483741"/>
-              <ac:spMk id="4" creationId="{00000000-0000-0000-0000-000000000000}"/>
-            </ac:spMkLst>
-          </pc:spChg>
         </pc:sldLayoutChg>
         <pc:sldLayoutChg chg="modSp">
           <pc:chgData name="Tommaso Ghilardi (Staff)" userId="b9591c49-3913-47aa-a516-44e0ea4248a4" providerId="ADAL" clId="{DFF45E3B-A62A-4CBF-971A-719412A1D47F}" dt="2025-08-29T17:09:02.087" v="99"/>
@@ -1407,24 +446,6 @@
             <pc:sldMasterMk cId="1786956075" sldId="2147483732"/>
             <pc:sldLayoutMk cId="67552525" sldId="2147483743"/>
           </pc:sldLayoutMkLst>
-          <pc:spChg chg="mod">
-            <ac:chgData name="Tommaso Ghilardi (Staff)" userId="b9591c49-3913-47aa-a516-44e0ea4248a4" providerId="ADAL" clId="{DFF45E3B-A62A-4CBF-971A-719412A1D47F}" dt="2025-08-29T17:09:02.087" v="99"/>
-            <ac:spMkLst>
-              <pc:docMk/>
-              <pc:sldMasterMk cId="1786956075" sldId="2147483732"/>
-              <pc:sldLayoutMk cId="67552525" sldId="2147483743"/>
-              <ac:spMk id="2" creationId="{00000000-0000-0000-0000-000000000000}"/>
-            </ac:spMkLst>
-          </pc:spChg>
-          <pc:spChg chg="mod">
-            <ac:chgData name="Tommaso Ghilardi (Staff)" userId="b9591c49-3913-47aa-a516-44e0ea4248a4" providerId="ADAL" clId="{DFF45E3B-A62A-4CBF-971A-719412A1D47F}" dt="2025-08-29T17:09:02.087" v="99"/>
-            <ac:spMkLst>
-              <pc:docMk/>
-              <pc:sldMasterMk cId="1786956075" sldId="2147483732"/>
-              <pc:sldLayoutMk cId="67552525" sldId="2147483743"/>
-              <ac:spMk id="3" creationId="{00000000-0000-0000-0000-000000000000}"/>
-            </ac:spMkLst>
-          </pc:spChg>
         </pc:sldLayoutChg>
       </pc:sldMasterChg>
       <pc:sldMasterChg chg="modSp modSldLayout">
@@ -1433,46 +454,6 @@
           <pc:docMk/>
           <pc:sldMasterMk cId="1927761254" sldId="2147483744"/>
         </pc:sldMasterMkLst>
-        <pc:spChg chg="mod">
-          <ac:chgData name="Tommaso Ghilardi (Staff)" userId="b9591c49-3913-47aa-a516-44e0ea4248a4" providerId="ADAL" clId="{DFF45E3B-A62A-4CBF-971A-719412A1D47F}" dt="2025-08-29T17:08:43.094" v="76"/>
-          <ac:spMkLst>
-            <pc:docMk/>
-            <pc:sldMasterMk cId="1927761254" sldId="2147483744"/>
-            <ac:spMk id="2" creationId="{00000000-0000-0000-0000-000000000000}"/>
-          </ac:spMkLst>
-        </pc:spChg>
-        <pc:spChg chg="mod">
-          <ac:chgData name="Tommaso Ghilardi (Staff)" userId="b9591c49-3913-47aa-a516-44e0ea4248a4" providerId="ADAL" clId="{DFF45E3B-A62A-4CBF-971A-719412A1D47F}" dt="2025-08-29T17:08:43.094" v="76"/>
-          <ac:spMkLst>
-            <pc:docMk/>
-            <pc:sldMasterMk cId="1927761254" sldId="2147483744"/>
-            <ac:spMk id="3" creationId="{00000000-0000-0000-0000-000000000000}"/>
-          </ac:spMkLst>
-        </pc:spChg>
-        <pc:spChg chg="mod">
-          <ac:chgData name="Tommaso Ghilardi (Staff)" userId="b9591c49-3913-47aa-a516-44e0ea4248a4" providerId="ADAL" clId="{DFF45E3B-A62A-4CBF-971A-719412A1D47F}" dt="2025-08-29T17:08:43.094" v="76"/>
-          <ac:spMkLst>
-            <pc:docMk/>
-            <pc:sldMasterMk cId="1927761254" sldId="2147483744"/>
-            <ac:spMk id="4" creationId="{00000000-0000-0000-0000-000000000000}"/>
-          </ac:spMkLst>
-        </pc:spChg>
-        <pc:spChg chg="mod">
-          <ac:chgData name="Tommaso Ghilardi (Staff)" userId="b9591c49-3913-47aa-a516-44e0ea4248a4" providerId="ADAL" clId="{DFF45E3B-A62A-4CBF-971A-719412A1D47F}" dt="2025-08-29T17:08:43.094" v="76"/>
-          <ac:spMkLst>
-            <pc:docMk/>
-            <pc:sldMasterMk cId="1927761254" sldId="2147483744"/>
-            <ac:spMk id="5" creationId="{00000000-0000-0000-0000-000000000000}"/>
-          </ac:spMkLst>
-        </pc:spChg>
-        <pc:spChg chg="mod">
-          <ac:chgData name="Tommaso Ghilardi (Staff)" userId="b9591c49-3913-47aa-a516-44e0ea4248a4" providerId="ADAL" clId="{DFF45E3B-A62A-4CBF-971A-719412A1D47F}" dt="2025-08-29T17:08:43.094" v="76"/>
-          <ac:spMkLst>
-            <pc:docMk/>
-            <pc:sldMasterMk cId="1927761254" sldId="2147483744"/>
-            <ac:spMk id="6" creationId="{00000000-0000-0000-0000-000000000000}"/>
-          </ac:spMkLst>
-        </pc:spChg>
         <pc:sldLayoutChg chg="modSp">
           <pc:chgData name="Tommaso Ghilardi (Staff)" userId="b9591c49-3913-47aa-a516-44e0ea4248a4" providerId="ADAL" clId="{DFF45E3B-A62A-4CBF-971A-719412A1D47F}" dt="2025-08-29T17:08:43.094" v="76"/>
           <pc:sldLayoutMkLst>
@@ -1480,24 +461,6 @@
             <pc:sldMasterMk cId="1927761254" sldId="2147483744"/>
             <pc:sldLayoutMk cId="1340027420" sldId="2147483745"/>
           </pc:sldLayoutMkLst>
-          <pc:spChg chg="mod">
-            <ac:chgData name="Tommaso Ghilardi (Staff)" userId="b9591c49-3913-47aa-a516-44e0ea4248a4" providerId="ADAL" clId="{DFF45E3B-A62A-4CBF-971A-719412A1D47F}" dt="2025-08-29T17:08:43.094" v="76"/>
-            <ac:spMkLst>
-              <pc:docMk/>
-              <pc:sldMasterMk cId="1927761254" sldId="2147483744"/>
-              <pc:sldLayoutMk cId="1340027420" sldId="2147483745"/>
-              <ac:spMk id="2" creationId="{00000000-0000-0000-0000-000000000000}"/>
-            </ac:spMkLst>
-          </pc:spChg>
-          <pc:spChg chg="mod">
-            <ac:chgData name="Tommaso Ghilardi (Staff)" userId="b9591c49-3913-47aa-a516-44e0ea4248a4" providerId="ADAL" clId="{DFF45E3B-A62A-4CBF-971A-719412A1D47F}" dt="2025-08-29T17:08:43.094" v="76"/>
-            <ac:spMkLst>
-              <pc:docMk/>
-              <pc:sldMasterMk cId="1927761254" sldId="2147483744"/>
-              <pc:sldLayoutMk cId="1340027420" sldId="2147483745"/>
-              <ac:spMk id="3" creationId="{00000000-0000-0000-0000-000000000000}"/>
-            </ac:spMkLst>
-          </pc:spChg>
         </pc:sldLayoutChg>
         <pc:sldLayoutChg chg="modSp">
           <pc:chgData name="Tommaso Ghilardi (Staff)" userId="b9591c49-3913-47aa-a516-44e0ea4248a4" providerId="ADAL" clId="{DFF45E3B-A62A-4CBF-971A-719412A1D47F}" dt="2025-08-29T17:08:43.094" v="76"/>
@@ -1506,24 +469,6 @@
             <pc:sldMasterMk cId="1927761254" sldId="2147483744"/>
             <pc:sldLayoutMk cId="3137028587" sldId="2147483747"/>
           </pc:sldLayoutMkLst>
-          <pc:spChg chg="mod">
-            <ac:chgData name="Tommaso Ghilardi (Staff)" userId="b9591c49-3913-47aa-a516-44e0ea4248a4" providerId="ADAL" clId="{DFF45E3B-A62A-4CBF-971A-719412A1D47F}" dt="2025-08-29T17:08:43.094" v="76"/>
-            <ac:spMkLst>
-              <pc:docMk/>
-              <pc:sldMasterMk cId="1927761254" sldId="2147483744"/>
-              <pc:sldLayoutMk cId="3137028587" sldId="2147483747"/>
-              <ac:spMk id="2" creationId="{00000000-0000-0000-0000-000000000000}"/>
-            </ac:spMkLst>
-          </pc:spChg>
-          <pc:spChg chg="mod">
-            <ac:chgData name="Tommaso Ghilardi (Staff)" userId="b9591c49-3913-47aa-a516-44e0ea4248a4" providerId="ADAL" clId="{DFF45E3B-A62A-4CBF-971A-719412A1D47F}" dt="2025-08-29T17:08:43.094" v="76"/>
-            <ac:spMkLst>
-              <pc:docMk/>
-              <pc:sldMasterMk cId="1927761254" sldId="2147483744"/>
-              <pc:sldLayoutMk cId="3137028587" sldId="2147483747"/>
-              <ac:spMk id="3" creationId="{00000000-0000-0000-0000-000000000000}"/>
-            </ac:spMkLst>
-          </pc:spChg>
         </pc:sldLayoutChg>
         <pc:sldLayoutChg chg="modSp">
           <pc:chgData name="Tommaso Ghilardi (Staff)" userId="b9591c49-3913-47aa-a516-44e0ea4248a4" providerId="ADAL" clId="{DFF45E3B-A62A-4CBF-971A-719412A1D47F}" dt="2025-08-29T17:08:43.094" v="76"/>
@@ -1532,24 +477,6 @@
             <pc:sldMasterMk cId="1927761254" sldId="2147483744"/>
             <pc:sldLayoutMk cId="3802217111" sldId="2147483748"/>
           </pc:sldLayoutMkLst>
-          <pc:spChg chg="mod">
-            <ac:chgData name="Tommaso Ghilardi (Staff)" userId="b9591c49-3913-47aa-a516-44e0ea4248a4" providerId="ADAL" clId="{DFF45E3B-A62A-4CBF-971A-719412A1D47F}" dt="2025-08-29T17:08:43.094" v="76"/>
-            <ac:spMkLst>
-              <pc:docMk/>
-              <pc:sldMasterMk cId="1927761254" sldId="2147483744"/>
-              <pc:sldLayoutMk cId="3802217111" sldId="2147483748"/>
-              <ac:spMk id="3" creationId="{00000000-0000-0000-0000-000000000000}"/>
-            </ac:spMkLst>
-          </pc:spChg>
-          <pc:spChg chg="mod">
-            <ac:chgData name="Tommaso Ghilardi (Staff)" userId="b9591c49-3913-47aa-a516-44e0ea4248a4" providerId="ADAL" clId="{DFF45E3B-A62A-4CBF-971A-719412A1D47F}" dt="2025-08-29T17:08:43.094" v="76"/>
-            <ac:spMkLst>
-              <pc:docMk/>
-              <pc:sldMasterMk cId="1927761254" sldId="2147483744"/>
-              <pc:sldLayoutMk cId="3802217111" sldId="2147483748"/>
-              <ac:spMk id="4" creationId="{00000000-0000-0000-0000-000000000000}"/>
-            </ac:spMkLst>
-          </pc:spChg>
         </pc:sldLayoutChg>
         <pc:sldLayoutChg chg="modSp">
           <pc:chgData name="Tommaso Ghilardi (Staff)" userId="b9591c49-3913-47aa-a516-44e0ea4248a4" providerId="ADAL" clId="{DFF45E3B-A62A-4CBF-971A-719412A1D47F}" dt="2025-08-29T17:08:43.094" v="76"/>
@@ -1558,51 +485,6 @@
             <pc:sldMasterMk cId="1927761254" sldId="2147483744"/>
             <pc:sldLayoutMk cId="842441905" sldId="2147483749"/>
           </pc:sldLayoutMkLst>
-          <pc:spChg chg="mod">
-            <ac:chgData name="Tommaso Ghilardi (Staff)" userId="b9591c49-3913-47aa-a516-44e0ea4248a4" providerId="ADAL" clId="{DFF45E3B-A62A-4CBF-971A-719412A1D47F}" dt="2025-08-29T17:08:43.094" v="76"/>
-            <ac:spMkLst>
-              <pc:docMk/>
-              <pc:sldMasterMk cId="1927761254" sldId="2147483744"/>
-              <pc:sldLayoutMk cId="842441905" sldId="2147483749"/>
-              <ac:spMk id="2" creationId="{00000000-0000-0000-0000-000000000000}"/>
-            </ac:spMkLst>
-          </pc:spChg>
-          <pc:spChg chg="mod">
-            <ac:chgData name="Tommaso Ghilardi (Staff)" userId="b9591c49-3913-47aa-a516-44e0ea4248a4" providerId="ADAL" clId="{DFF45E3B-A62A-4CBF-971A-719412A1D47F}" dt="2025-08-29T17:08:43.094" v="76"/>
-            <ac:spMkLst>
-              <pc:docMk/>
-              <pc:sldMasterMk cId="1927761254" sldId="2147483744"/>
-              <pc:sldLayoutMk cId="842441905" sldId="2147483749"/>
-              <ac:spMk id="3" creationId="{00000000-0000-0000-0000-000000000000}"/>
-            </ac:spMkLst>
-          </pc:spChg>
-          <pc:spChg chg="mod">
-            <ac:chgData name="Tommaso Ghilardi (Staff)" userId="b9591c49-3913-47aa-a516-44e0ea4248a4" providerId="ADAL" clId="{DFF45E3B-A62A-4CBF-971A-719412A1D47F}" dt="2025-08-29T17:08:43.094" v="76"/>
-            <ac:spMkLst>
-              <pc:docMk/>
-              <pc:sldMasterMk cId="1927761254" sldId="2147483744"/>
-              <pc:sldLayoutMk cId="842441905" sldId="2147483749"/>
-              <ac:spMk id="4" creationId="{00000000-0000-0000-0000-000000000000}"/>
-            </ac:spMkLst>
-          </pc:spChg>
-          <pc:spChg chg="mod">
-            <ac:chgData name="Tommaso Ghilardi (Staff)" userId="b9591c49-3913-47aa-a516-44e0ea4248a4" providerId="ADAL" clId="{DFF45E3B-A62A-4CBF-971A-719412A1D47F}" dt="2025-08-29T17:08:43.094" v="76"/>
-            <ac:spMkLst>
-              <pc:docMk/>
-              <pc:sldMasterMk cId="1927761254" sldId="2147483744"/>
-              <pc:sldLayoutMk cId="842441905" sldId="2147483749"/>
-              <ac:spMk id="5" creationId="{00000000-0000-0000-0000-000000000000}"/>
-            </ac:spMkLst>
-          </pc:spChg>
-          <pc:spChg chg="mod">
-            <ac:chgData name="Tommaso Ghilardi (Staff)" userId="b9591c49-3913-47aa-a516-44e0ea4248a4" providerId="ADAL" clId="{DFF45E3B-A62A-4CBF-971A-719412A1D47F}" dt="2025-08-29T17:08:43.094" v="76"/>
-            <ac:spMkLst>
-              <pc:docMk/>
-              <pc:sldMasterMk cId="1927761254" sldId="2147483744"/>
-              <pc:sldLayoutMk cId="842441905" sldId="2147483749"/>
-              <ac:spMk id="6" creationId="{00000000-0000-0000-0000-000000000000}"/>
-            </ac:spMkLst>
-          </pc:spChg>
         </pc:sldLayoutChg>
         <pc:sldLayoutChg chg="modSp">
           <pc:chgData name="Tommaso Ghilardi (Staff)" userId="b9591c49-3913-47aa-a516-44e0ea4248a4" providerId="ADAL" clId="{DFF45E3B-A62A-4CBF-971A-719412A1D47F}" dt="2025-08-29T17:08:43.094" v="76"/>
@@ -1611,33 +493,6 @@
             <pc:sldMasterMk cId="1927761254" sldId="2147483744"/>
             <pc:sldLayoutMk cId="2814680185" sldId="2147483752"/>
           </pc:sldLayoutMkLst>
-          <pc:spChg chg="mod">
-            <ac:chgData name="Tommaso Ghilardi (Staff)" userId="b9591c49-3913-47aa-a516-44e0ea4248a4" providerId="ADAL" clId="{DFF45E3B-A62A-4CBF-971A-719412A1D47F}" dt="2025-08-29T17:08:43.094" v="76"/>
-            <ac:spMkLst>
-              <pc:docMk/>
-              <pc:sldMasterMk cId="1927761254" sldId="2147483744"/>
-              <pc:sldLayoutMk cId="2814680185" sldId="2147483752"/>
-              <ac:spMk id="2" creationId="{00000000-0000-0000-0000-000000000000}"/>
-            </ac:spMkLst>
-          </pc:spChg>
-          <pc:spChg chg="mod">
-            <ac:chgData name="Tommaso Ghilardi (Staff)" userId="b9591c49-3913-47aa-a516-44e0ea4248a4" providerId="ADAL" clId="{DFF45E3B-A62A-4CBF-971A-719412A1D47F}" dt="2025-08-29T17:08:43.094" v="76"/>
-            <ac:spMkLst>
-              <pc:docMk/>
-              <pc:sldMasterMk cId="1927761254" sldId="2147483744"/>
-              <pc:sldLayoutMk cId="2814680185" sldId="2147483752"/>
-              <ac:spMk id="3" creationId="{00000000-0000-0000-0000-000000000000}"/>
-            </ac:spMkLst>
-          </pc:spChg>
-          <pc:spChg chg="mod">
-            <ac:chgData name="Tommaso Ghilardi (Staff)" userId="b9591c49-3913-47aa-a516-44e0ea4248a4" providerId="ADAL" clId="{DFF45E3B-A62A-4CBF-971A-719412A1D47F}" dt="2025-08-29T17:08:43.094" v="76"/>
-            <ac:spMkLst>
-              <pc:docMk/>
-              <pc:sldMasterMk cId="1927761254" sldId="2147483744"/>
-              <pc:sldLayoutMk cId="2814680185" sldId="2147483752"/>
-              <ac:spMk id="4" creationId="{00000000-0000-0000-0000-000000000000}"/>
-            </ac:spMkLst>
-          </pc:spChg>
         </pc:sldLayoutChg>
         <pc:sldLayoutChg chg="modSp">
           <pc:chgData name="Tommaso Ghilardi (Staff)" userId="b9591c49-3913-47aa-a516-44e0ea4248a4" providerId="ADAL" clId="{DFF45E3B-A62A-4CBF-971A-719412A1D47F}" dt="2025-08-29T17:08:43.094" v="76"/>
@@ -1646,33 +501,6 @@
             <pc:sldMasterMk cId="1927761254" sldId="2147483744"/>
             <pc:sldLayoutMk cId="3760103281" sldId="2147483753"/>
           </pc:sldLayoutMkLst>
-          <pc:spChg chg="mod">
-            <ac:chgData name="Tommaso Ghilardi (Staff)" userId="b9591c49-3913-47aa-a516-44e0ea4248a4" providerId="ADAL" clId="{DFF45E3B-A62A-4CBF-971A-719412A1D47F}" dt="2025-08-29T17:08:43.094" v="76"/>
-            <ac:spMkLst>
-              <pc:docMk/>
-              <pc:sldMasterMk cId="1927761254" sldId="2147483744"/>
-              <pc:sldLayoutMk cId="3760103281" sldId="2147483753"/>
-              <ac:spMk id="2" creationId="{00000000-0000-0000-0000-000000000000}"/>
-            </ac:spMkLst>
-          </pc:spChg>
-          <pc:spChg chg="mod">
-            <ac:chgData name="Tommaso Ghilardi (Staff)" userId="b9591c49-3913-47aa-a516-44e0ea4248a4" providerId="ADAL" clId="{DFF45E3B-A62A-4CBF-971A-719412A1D47F}" dt="2025-08-29T17:08:43.094" v="76"/>
-            <ac:spMkLst>
-              <pc:docMk/>
-              <pc:sldMasterMk cId="1927761254" sldId="2147483744"/>
-              <pc:sldLayoutMk cId="3760103281" sldId="2147483753"/>
-              <ac:spMk id="3" creationId="{00000000-0000-0000-0000-000000000000}"/>
-            </ac:spMkLst>
-          </pc:spChg>
-          <pc:spChg chg="mod">
-            <ac:chgData name="Tommaso Ghilardi (Staff)" userId="b9591c49-3913-47aa-a516-44e0ea4248a4" providerId="ADAL" clId="{DFF45E3B-A62A-4CBF-971A-719412A1D47F}" dt="2025-08-29T17:08:43.094" v="76"/>
-            <ac:spMkLst>
-              <pc:docMk/>
-              <pc:sldMasterMk cId="1927761254" sldId="2147483744"/>
-              <pc:sldLayoutMk cId="3760103281" sldId="2147483753"/>
-              <ac:spMk id="4" creationId="{00000000-0000-0000-0000-000000000000}"/>
-            </ac:spMkLst>
-          </pc:spChg>
         </pc:sldLayoutChg>
         <pc:sldLayoutChg chg="modSp">
           <pc:chgData name="Tommaso Ghilardi (Staff)" userId="b9591c49-3913-47aa-a516-44e0ea4248a4" providerId="ADAL" clId="{DFF45E3B-A62A-4CBF-971A-719412A1D47F}" dt="2025-08-29T17:08:43.094" v="76"/>
@@ -1681,24 +509,6 @@
             <pc:sldMasterMk cId="1927761254" sldId="2147483744"/>
             <pc:sldLayoutMk cId="635936015" sldId="2147483755"/>
           </pc:sldLayoutMkLst>
-          <pc:spChg chg="mod">
-            <ac:chgData name="Tommaso Ghilardi (Staff)" userId="b9591c49-3913-47aa-a516-44e0ea4248a4" providerId="ADAL" clId="{DFF45E3B-A62A-4CBF-971A-719412A1D47F}" dt="2025-08-29T17:08:43.094" v="76"/>
-            <ac:spMkLst>
-              <pc:docMk/>
-              <pc:sldMasterMk cId="1927761254" sldId="2147483744"/>
-              <pc:sldLayoutMk cId="635936015" sldId="2147483755"/>
-              <ac:spMk id="2" creationId="{00000000-0000-0000-0000-000000000000}"/>
-            </ac:spMkLst>
-          </pc:spChg>
-          <pc:spChg chg="mod">
-            <ac:chgData name="Tommaso Ghilardi (Staff)" userId="b9591c49-3913-47aa-a516-44e0ea4248a4" providerId="ADAL" clId="{DFF45E3B-A62A-4CBF-971A-719412A1D47F}" dt="2025-08-29T17:08:43.094" v="76"/>
-            <ac:spMkLst>
-              <pc:docMk/>
-              <pc:sldMasterMk cId="1927761254" sldId="2147483744"/>
-              <pc:sldLayoutMk cId="635936015" sldId="2147483755"/>
-              <ac:spMk id="3" creationId="{00000000-0000-0000-0000-000000000000}"/>
-            </ac:spMkLst>
-          </pc:spChg>
         </pc:sldLayoutChg>
       </pc:sldMasterChg>
       <pc:sldMasterChg chg="modSp modSldLayout">
@@ -1707,46 +517,6 @@
           <pc:docMk/>
           <pc:sldMasterMk cId="1509930785" sldId="2147483756"/>
         </pc:sldMasterMkLst>
-        <pc:spChg chg="mod">
-          <ac:chgData name="Tommaso Ghilardi (Staff)" userId="b9591c49-3913-47aa-a516-44e0ea4248a4" providerId="ADAL" clId="{DFF45E3B-A62A-4CBF-971A-719412A1D47F}" dt="2025-08-29T17:08:40.261" v="75"/>
-          <ac:spMkLst>
-            <pc:docMk/>
-            <pc:sldMasterMk cId="1509930785" sldId="2147483756"/>
-            <ac:spMk id="2" creationId="{00000000-0000-0000-0000-000000000000}"/>
-          </ac:spMkLst>
-        </pc:spChg>
-        <pc:spChg chg="mod">
-          <ac:chgData name="Tommaso Ghilardi (Staff)" userId="b9591c49-3913-47aa-a516-44e0ea4248a4" providerId="ADAL" clId="{DFF45E3B-A62A-4CBF-971A-719412A1D47F}" dt="2025-08-29T17:08:40.261" v="75"/>
-          <ac:spMkLst>
-            <pc:docMk/>
-            <pc:sldMasterMk cId="1509930785" sldId="2147483756"/>
-            <ac:spMk id="3" creationId="{00000000-0000-0000-0000-000000000000}"/>
-          </ac:spMkLst>
-        </pc:spChg>
-        <pc:spChg chg="mod">
-          <ac:chgData name="Tommaso Ghilardi (Staff)" userId="b9591c49-3913-47aa-a516-44e0ea4248a4" providerId="ADAL" clId="{DFF45E3B-A62A-4CBF-971A-719412A1D47F}" dt="2025-08-29T17:08:40.261" v="75"/>
-          <ac:spMkLst>
-            <pc:docMk/>
-            <pc:sldMasterMk cId="1509930785" sldId="2147483756"/>
-            <ac:spMk id="4" creationId="{00000000-0000-0000-0000-000000000000}"/>
-          </ac:spMkLst>
-        </pc:spChg>
-        <pc:spChg chg="mod">
-          <ac:chgData name="Tommaso Ghilardi (Staff)" userId="b9591c49-3913-47aa-a516-44e0ea4248a4" providerId="ADAL" clId="{DFF45E3B-A62A-4CBF-971A-719412A1D47F}" dt="2025-08-29T17:08:40.261" v="75"/>
-          <ac:spMkLst>
-            <pc:docMk/>
-            <pc:sldMasterMk cId="1509930785" sldId="2147483756"/>
-            <ac:spMk id="5" creationId="{00000000-0000-0000-0000-000000000000}"/>
-          </ac:spMkLst>
-        </pc:spChg>
-        <pc:spChg chg="mod">
-          <ac:chgData name="Tommaso Ghilardi (Staff)" userId="b9591c49-3913-47aa-a516-44e0ea4248a4" providerId="ADAL" clId="{DFF45E3B-A62A-4CBF-971A-719412A1D47F}" dt="2025-08-29T17:08:40.261" v="75"/>
-          <ac:spMkLst>
-            <pc:docMk/>
-            <pc:sldMasterMk cId="1509930785" sldId="2147483756"/>
-            <ac:spMk id="6" creationId="{00000000-0000-0000-0000-000000000000}"/>
-          </ac:spMkLst>
-        </pc:spChg>
         <pc:sldLayoutChg chg="modSp">
           <pc:chgData name="Tommaso Ghilardi (Staff)" userId="b9591c49-3913-47aa-a516-44e0ea4248a4" providerId="ADAL" clId="{DFF45E3B-A62A-4CBF-971A-719412A1D47F}" dt="2025-08-29T17:08:40.261" v="75"/>
           <pc:sldLayoutMkLst>
@@ -1754,24 +524,6 @@
             <pc:sldMasterMk cId="1509930785" sldId="2147483756"/>
             <pc:sldLayoutMk cId="121837334" sldId="2147483757"/>
           </pc:sldLayoutMkLst>
-          <pc:spChg chg="mod">
-            <ac:chgData name="Tommaso Ghilardi (Staff)" userId="b9591c49-3913-47aa-a516-44e0ea4248a4" providerId="ADAL" clId="{DFF45E3B-A62A-4CBF-971A-719412A1D47F}" dt="2025-08-29T17:08:40.261" v="75"/>
-            <ac:spMkLst>
-              <pc:docMk/>
-              <pc:sldMasterMk cId="1509930785" sldId="2147483756"/>
-              <pc:sldLayoutMk cId="121837334" sldId="2147483757"/>
-              <ac:spMk id="2" creationId="{00000000-0000-0000-0000-000000000000}"/>
-            </ac:spMkLst>
-          </pc:spChg>
-          <pc:spChg chg="mod">
-            <ac:chgData name="Tommaso Ghilardi (Staff)" userId="b9591c49-3913-47aa-a516-44e0ea4248a4" providerId="ADAL" clId="{DFF45E3B-A62A-4CBF-971A-719412A1D47F}" dt="2025-08-29T17:08:40.261" v="75"/>
-            <ac:spMkLst>
-              <pc:docMk/>
-              <pc:sldMasterMk cId="1509930785" sldId="2147483756"/>
-              <pc:sldLayoutMk cId="121837334" sldId="2147483757"/>
-              <ac:spMk id="3" creationId="{00000000-0000-0000-0000-000000000000}"/>
-            </ac:spMkLst>
-          </pc:spChg>
         </pc:sldLayoutChg>
         <pc:sldLayoutChg chg="modSp">
           <pc:chgData name="Tommaso Ghilardi (Staff)" userId="b9591c49-3913-47aa-a516-44e0ea4248a4" providerId="ADAL" clId="{DFF45E3B-A62A-4CBF-971A-719412A1D47F}" dt="2025-08-29T17:08:40.261" v="75"/>
@@ -1780,24 +532,6 @@
             <pc:sldMasterMk cId="1509930785" sldId="2147483756"/>
             <pc:sldLayoutMk cId="2520438587" sldId="2147483759"/>
           </pc:sldLayoutMkLst>
-          <pc:spChg chg="mod">
-            <ac:chgData name="Tommaso Ghilardi (Staff)" userId="b9591c49-3913-47aa-a516-44e0ea4248a4" providerId="ADAL" clId="{DFF45E3B-A62A-4CBF-971A-719412A1D47F}" dt="2025-08-29T17:08:40.261" v="75"/>
-            <ac:spMkLst>
-              <pc:docMk/>
-              <pc:sldMasterMk cId="1509930785" sldId="2147483756"/>
-              <pc:sldLayoutMk cId="2520438587" sldId="2147483759"/>
-              <ac:spMk id="2" creationId="{00000000-0000-0000-0000-000000000000}"/>
-            </ac:spMkLst>
-          </pc:spChg>
-          <pc:spChg chg="mod">
-            <ac:chgData name="Tommaso Ghilardi (Staff)" userId="b9591c49-3913-47aa-a516-44e0ea4248a4" providerId="ADAL" clId="{DFF45E3B-A62A-4CBF-971A-719412A1D47F}" dt="2025-08-29T17:08:40.261" v="75"/>
-            <ac:spMkLst>
-              <pc:docMk/>
-              <pc:sldMasterMk cId="1509930785" sldId="2147483756"/>
-              <pc:sldLayoutMk cId="2520438587" sldId="2147483759"/>
-              <ac:spMk id="3" creationId="{00000000-0000-0000-0000-000000000000}"/>
-            </ac:spMkLst>
-          </pc:spChg>
         </pc:sldLayoutChg>
         <pc:sldLayoutChg chg="modSp">
           <pc:chgData name="Tommaso Ghilardi (Staff)" userId="b9591c49-3913-47aa-a516-44e0ea4248a4" providerId="ADAL" clId="{DFF45E3B-A62A-4CBF-971A-719412A1D47F}" dt="2025-08-29T17:08:40.261" v="75"/>
@@ -1806,24 +540,6 @@
             <pc:sldMasterMk cId="1509930785" sldId="2147483756"/>
             <pc:sldLayoutMk cId="2212333874" sldId="2147483760"/>
           </pc:sldLayoutMkLst>
-          <pc:spChg chg="mod">
-            <ac:chgData name="Tommaso Ghilardi (Staff)" userId="b9591c49-3913-47aa-a516-44e0ea4248a4" providerId="ADAL" clId="{DFF45E3B-A62A-4CBF-971A-719412A1D47F}" dt="2025-08-29T17:08:40.261" v="75"/>
-            <ac:spMkLst>
-              <pc:docMk/>
-              <pc:sldMasterMk cId="1509930785" sldId="2147483756"/>
-              <pc:sldLayoutMk cId="2212333874" sldId="2147483760"/>
-              <ac:spMk id="3" creationId="{00000000-0000-0000-0000-000000000000}"/>
-            </ac:spMkLst>
-          </pc:spChg>
-          <pc:spChg chg="mod">
-            <ac:chgData name="Tommaso Ghilardi (Staff)" userId="b9591c49-3913-47aa-a516-44e0ea4248a4" providerId="ADAL" clId="{DFF45E3B-A62A-4CBF-971A-719412A1D47F}" dt="2025-08-29T17:08:40.261" v="75"/>
-            <ac:spMkLst>
-              <pc:docMk/>
-              <pc:sldMasterMk cId="1509930785" sldId="2147483756"/>
-              <pc:sldLayoutMk cId="2212333874" sldId="2147483760"/>
-              <ac:spMk id="4" creationId="{00000000-0000-0000-0000-000000000000}"/>
-            </ac:spMkLst>
-          </pc:spChg>
         </pc:sldLayoutChg>
         <pc:sldLayoutChg chg="modSp">
           <pc:chgData name="Tommaso Ghilardi (Staff)" userId="b9591c49-3913-47aa-a516-44e0ea4248a4" providerId="ADAL" clId="{DFF45E3B-A62A-4CBF-971A-719412A1D47F}" dt="2025-08-29T17:08:40.261" v="75"/>
@@ -1832,51 +548,6 @@
             <pc:sldMasterMk cId="1509930785" sldId="2147483756"/>
             <pc:sldLayoutMk cId="3267320617" sldId="2147483761"/>
           </pc:sldLayoutMkLst>
-          <pc:spChg chg="mod">
-            <ac:chgData name="Tommaso Ghilardi (Staff)" userId="b9591c49-3913-47aa-a516-44e0ea4248a4" providerId="ADAL" clId="{DFF45E3B-A62A-4CBF-971A-719412A1D47F}" dt="2025-08-29T17:08:40.261" v="75"/>
-            <ac:spMkLst>
-              <pc:docMk/>
-              <pc:sldMasterMk cId="1509930785" sldId="2147483756"/>
-              <pc:sldLayoutMk cId="3267320617" sldId="2147483761"/>
-              <ac:spMk id="2" creationId="{00000000-0000-0000-0000-000000000000}"/>
-            </ac:spMkLst>
-          </pc:spChg>
-          <pc:spChg chg="mod">
-            <ac:chgData name="Tommaso Ghilardi (Staff)" userId="b9591c49-3913-47aa-a516-44e0ea4248a4" providerId="ADAL" clId="{DFF45E3B-A62A-4CBF-971A-719412A1D47F}" dt="2025-08-29T17:08:40.261" v="75"/>
-            <ac:spMkLst>
-              <pc:docMk/>
-              <pc:sldMasterMk cId="1509930785" sldId="2147483756"/>
-              <pc:sldLayoutMk cId="3267320617" sldId="2147483761"/>
-              <ac:spMk id="3" creationId="{00000000-0000-0000-0000-000000000000}"/>
-            </ac:spMkLst>
-          </pc:spChg>
-          <pc:spChg chg="mod">
-            <ac:chgData name="Tommaso Ghilardi (Staff)" userId="b9591c49-3913-47aa-a516-44e0ea4248a4" providerId="ADAL" clId="{DFF45E3B-A62A-4CBF-971A-719412A1D47F}" dt="2025-08-29T17:08:40.261" v="75"/>
-            <ac:spMkLst>
-              <pc:docMk/>
-              <pc:sldMasterMk cId="1509930785" sldId="2147483756"/>
-              <pc:sldLayoutMk cId="3267320617" sldId="2147483761"/>
-              <ac:spMk id="4" creationId="{00000000-0000-0000-0000-000000000000}"/>
-            </ac:spMkLst>
-          </pc:spChg>
-          <pc:spChg chg="mod">
-            <ac:chgData name="Tommaso Ghilardi (Staff)" userId="b9591c49-3913-47aa-a516-44e0ea4248a4" providerId="ADAL" clId="{DFF45E3B-A62A-4CBF-971A-719412A1D47F}" dt="2025-08-29T17:08:40.261" v="75"/>
-            <ac:spMkLst>
-              <pc:docMk/>
-              <pc:sldMasterMk cId="1509930785" sldId="2147483756"/>
-              <pc:sldLayoutMk cId="3267320617" sldId="2147483761"/>
-              <ac:spMk id="5" creationId="{00000000-0000-0000-0000-000000000000}"/>
-            </ac:spMkLst>
-          </pc:spChg>
-          <pc:spChg chg="mod">
-            <ac:chgData name="Tommaso Ghilardi (Staff)" userId="b9591c49-3913-47aa-a516-44e0ea4248a4" providerId="ADAL" clId="{DFF45E3B-A62A-4CBF-971A-719412A1D47F}" dt="2025-08-29T17:08:40.261" v="75"/>
-            <ac:spMkLst>
-              <pc:docMk/>
-              <pc:sldMasterMk cId="1509930785" sldId="2147483756"/>
-              <pc:sldLayoutMk cId="3267320617" sldId="2147483761"/>
-              <ac:spMk id="6" creationId="{00000000-0000-0000-0000-000000000000}"/>
-            </ac:spMkLst>
-          </pc:spChg>
         </pc:sldLayoutChg>
         <pc:sldLayoutChg chg="modSp">
           <pc:chgData name="Tommaso Ghilardi (Staff)" userId="b9591c49-3913-47aa-a516-44e0ea4248a4" providerId="ADAL" clId="{DFF45E3B-A62A-4CBF-971A-719412A1D47F}" dt="2025-08-29T17:08:40.261" v="75"/>
@@ -1885,33 +556,6 @@
             <pc:sldMasterMk cId="1509930785" sldId="2147483756"/>
             <pc:sldLayoutMk cId="3098595251" sldId="2147483764"/>
           </pc:sldLayoutMkLst>
-          <pc:spChg chg="mod">
-            <ac:chgData name="Tommaso Ghilardi (Staff)" userId="b9591c49-3913-47aa-a516-44e0ea4248a4" providerId="ADAL" clId="{DFF45E3B-A62A-4CBF-971A-719412A1D47F}" dt="2025-08-29T17:08:40.261" v="75"/>
-            <ac:spMkLst>
-              <pc:docMk/>
-              <pc:sldMasterMk cId="1509930785" sldId="2147483756"/>
-              <pc:sldLayoutMk cId="3098595251" sldId="2147483764"/>
-              <ac:spMk id="2" creationId="{00000000-0000-0000-0000-000000000000}"/>
-            </ac:spMkLst>
-          </pc:spChg>
-          <pc:spChg chg="mod">
-            <ac:chgData name="Tommaso Ghilardi (Staff)" userId="b9591c49-3913-47aa-a516-44e0ea4248a4" providerId="ADAL" clId="{DFF45E3B-A62A-4CBF-971A-719412A1D47F}" dt="2025-08-29T17:08:40.261" v="75"/>
-            <ac:spMkLst>
-              <pc:docMk/>
-              <pc:sldMasterMk cId="1509930785" sldId="2147483756"/>
-              <pc:sldLayoutMk cId="3098595251" sldId="2147483764"/>
-              <ac:spMk id="3" creationId="{00000000-0000-0000-0000-000000000000}"/>
-            </ac:spMkLst>
-          </pc:spChg>
-          <pc:spChg chg="mod">
-            <ac:chgData name="Tommaso Ghilardi (Staff)" userId="b9591c49-3913-47aa-a516-44e0ea4248a4" providerId="ADAL" clId="{DFF45E3B-A62A-4CBF-971A-719412A1D47F}" dt="2025-08-29T17:08:40.261" v="75"/>
-            <ac:spMkLst>
-              <pc:docMk/>
-              <pc:sldMasterMk cId="1509930785" sldId="2147483756"/>
-              <pc:sldLayoutMk cId="3098595251" sldId="2147483764"/>
-              <ac:spMk id="4" creationId="{00000000-0000-0000-0000-000000000000}"/>
-            </ac:spMkLst>
-          </pc:spChg>
         </pc:sldLayoutChg>
         <pc:sldLayoutChg chg="modSp">
           <pc:chgData name="Tommaso Ghilardi (Staff)" userId="b9591c49-3913-47aa-a516-44e0ea4248a4" providerId="ADAL" clId="{DFF45E3B-A62A-4CBF-971A-719412A1D47F}" dt="2025-08-29T17:08:40.261" v="75"/>
@@ -1920,33 +564,6 @@
             <pc:sldMasterMk cId="1509930785" sldId="2147483756"/>
             <pc:sldLayoutMk cId="809153802" sldId="2147483765"/>
           </pc:sldLayoutMkLst>
-          <pc:spChg chg="mod">
-            <ac:chgData name="Tommaso Ghilardi (Staff)" userId="b9591c49-3913-47aa-a516-44e0ea4248a4" providerId="ADAL" clId="{DFF45E3B-A62A-4CBF-971A-719412A1D47F}" dt="2025-08-29T17:08:40.261" v="75"/>
-            <ac:spMkLst>
-              <pc:docMk/>
-              <pc:sldMasterMk cId="1509930785" sldId="2147483756"/>
-              <pc:sldLayoutMk cId="809153802" sldId="2147483765"/>
-              <ac:spMk id="2" creationId="{00000000-0000-0000-0000-000000000000}"/>
-            </ac:spMkLst>
-          </pc:spChg>
-          <pc:spChg chg="mod">
-            <ac:chgData name="Tommaso Ghilardi (Staff)" userId="b9591c49-3913-47aa-a516-44e0ea4248a4" providerId="ADAL" clId="{DFF45E3B-A62A-4CBF-971A-719412A1D47F}" dt="2025-08-29T17:08:40.261" v="75"/>
-            <ac:spMkLst>
-              <pc:docMk/>
-              <pc:sldMasterMk cId="1509930785" sldId="2147483756"/>
-              <pc:sldLayoutMk cId="809153802" sldId="2147483765"/>
-              <ac:spMk id="3" creationId="{00000000-0000-0000-0000-000000000000}"/>
-            </ac:spMkLst>
-          </pc:spChg>
-          <pc:spChg chg="mod">
-            <ac:chgData name="Tommaso Ghilardi (Staff)" userId="b9591c49-3913-47aa-a516-44e0ea4248a4" providerId="ADAL" clId="{DFF45E3B-A62A-4CBF-971A-719412A1D47F}" dt="2025-08-29T17:08:40.261" v="75"/>
-            <ac:spMkLst>
-              <pc:docMk/>
-              <pc:sldMasterMk cId="1509930785" sldId="2147483756"/>
-              <pc:sldLayoutMk cId="809153802" sldId="2147483765"/>
-              <ac:spMk id="4" creationId="{00000000-0000-0000-0000-000000000000}"/>
-            </ac:spMkLst>
-          </pc:spChg>
         </pc:sldLayoutChg>
         <pc:sldLayoutChg chg="modSp">
           <pc:chgData name="Tommaso Ghilardi (Staff)" userId="b9591c49-3913-47aa-a516-44e0ea4248a4" providerId="ADAL" clId="{DFF45E3B-A62A-4CBF-971A-719412A1D47F}" dt="2025-08-29T17:08:40.261" v="75"/>
@@ -1955,24 +572,6 @@
             <pc:sldMasterMk cId="1509930785" sldId="2147483756"/>
             <pc:sldLayoutMk cId="1163970481" sldId="2147483767"/>
           </pc:sldLayoutMkLst>
-          <pc:spChg chg="mod">
-            <ac:chgData name="Tommaso Ghilardi (Staff)" userId="b9591c49-3913-47aa-a516-44e0ea4248a4" providerId="ADAL" clId="{DFF45E3B-A62A-4CBF-971A-719412A1D47F}" dt="2025-08-29T17:08:40.261" v="75"/>
-            <ac:spMkLst>
-              <pc:docMk/>
-              <pc:sldMasterMk cId="1509930785" sldId="2147483756"/>
-              <pc:sldLayoutMk cId="1163970481" sldId="2147483767"/>
-              <ac:spMk id="2" creationId="{00000000-0000-0000-0000-000000000000}"/>
-            </ac:spMkLst>
-          </pc:spChg>
-          <pc:spChg chg="mod">
-            <ac:chgData name="Tommaso Ghilardi (Staff)" userId="b9591c49-3913-47aa-a516-44e0ea4248a4" providerId="ADAL" clId="{DFF45E3B-A62A-4CBF-971A-719412A1D47F}" dt="2025-08-29T17:08:40.261" v="75"/>
-            <ac:spMkLst>
-              <pc:docMk/>
-              <pc:sldMasterMk cId="1509930785" sldId="2147483756"/>
-              <pc:sldLayoutMk cId="1163970481" sldId="2147483767"/>
-              <ac:spMk id="3" creationId="{00000000-0000-0000-0000-000000000000}"/>
-            </ac:spMkLst>
-          </pc:spChg>
         </pc:sldLayoutChg>
       </pc:sldMasterChg>
     </pc:docChg>
@@ -2111,7 +710,7 @@
           <a:p>
             <a:fld id="{846CE7D5-CF57-46EF-B807-FDD0502418D4}" type="datetimeFigureOut">
               <a:rPr lang="en-GB" smtClean="0"/>
-              <a:t>30/08/2025</a:t>
+              <a:t>06/11/2025</a:t>
             </a:fld>
             <a:endParaRPr lang="en-GB"/>
           </a:p>
@@ -2281,7 +880,7 @@
           <a:p>
             <a:fld id="{846CE7D5-CF57-46EF-B807-FDD0502418D4}" type="datetimeFigureOut">
               <a:rPr lang="en-GB" smtClean="0"/>
-              <a:t>30/08/2025</a:t>
+              <a:t>06/11/2025</a:t>
             </a:fld>
             <a:endParaRPr lang="en-GB"/>
           </a:p>
@@ -2461,7 +1060,7 @@
           <a:p>
             <a:fld id="{846CE7D5-CF57-46EF-B807-FDD0502418D4}" type="datetimeFigureOut">
               <a:rPr lang="en-GB" smtClean="0"/>
-              <a:t>30/08/2025</a:t>
+              <a:t>06/11/2025</a:t>
             </a:fld>
             <a:endParaRPr lang="en-GB"/>
           </a:p>
@@ -2631,7 +1230,7 @@
           <a:p>
             <a:fld id="{846CE7D5-CF57-46EF-B807-FDD0502418D4}" type="datetimeFigureOut">
               <a:rPr lang="en-GB" smtClean="0"/>
-              <a:t>30/08/2025</a:t>
+              <a:t>06/11/2025</a:t>
             </a:fld>
             <a:endParaRPr lang="en-GB"/>
           </a:p>
@@ -2877,7 +1476,7 @@
           <a:p>
             <a:fld id="{846CE7D5-CF57-46EF-B807-FDD0502418D4}" type="datetimeFigureOut">
               <a:rPr lang="en-GB" smtClean="0"/>
-              <a:t>30/08/2025</a:t>
+              <a:t>06/11/2025</a:t>
             </a:fld>
             <a:endParaRPr lang="en-GB"/>
           </a:p>
@@ -3109,7 +1708,7 @@
           <a:p>
             <a:fld id="{846CE7D5-CF57-46EF-B807-FDD0502418D4}" type="datetimeFigureOut">
               <a:rPr lang="en-GB" smtClean="0"/>
-              <a:t>30/08/2025</a:t>
+              <a:t>06/11/2025</a:t>
             </a:fld>
             <a:endParaRPr lang="en-GB"/>
           </a:p>
@@ -3476,7 +2075,7 @@
           <a:p>
             <a:fld id="{846CE7D5-CF57-46EF-B807-FDD0502418D4}" type="datetimeFigureOut">
               <a:rPr lang="en-GB" smtClean="0"/>
-              <a:t>30/08/2025</a:t>
+              <a:t>06/11/2025</a:t>
             </a:fld>
             <a:endParaRPr lang="en-GB"/>
           </a:p>
@@ -3594,7 +2193,7 @@
           <a:p>
             <a:fld id="{846CE7D5-CF57-46EF-B807-FDD0502418D4}" type="datetimeFigureOut">
               <a:rPr lang="en-GB" smtClean="0"/>
-              <a:t>30/08/2025</a:t>
+              <a:t>06/11/2025</a:t>
             </a:fld>
             <a:endParaRPr lang="en-GB"/>
           </a:p>
@@ -3689,7 +2288,7 @@
           <a:p>
             <a:fld id="{846CE7D5-CF57-46EF-B807-FDD0502418D4}" type="datetimeFigureOut">
               <a:rPr lang="en-GB" smtClean="0"/>
-              <a:t>30/08/2025</a:t>
+              <a:t>06/11/2025</a:t>
             </a:fld>
             <a:endParaRPr lang="en-GB"/>
           </a:p>
@@ -3966,7 +2565,7 @@
           <a:p>
             <a:fld id="{846CE7D5-CF57-46EF-B807-FDD0502418D4}" type="datetimeFigureOut">
               <a:rPr lang="en-GB" smtClean="0"/>
-              <a:t>30/08/2025</a:t>
+              <a:t>06/11/2025</a:t>
             </a:fld>
             <a:endParaRPr lang="en-GB"/>
           </a:p>
@@ -4223,7 +2822,7 @@
           <a:p>
             <a:fld id="{846CE7D5-CF57-46EF-B807-FDD0502418D4}" type="datetimeFigureOut">
               <a:rPr lang="en-GB" smtClean="0"/>
-              <a:t>30/08/2025</a:t>
+              <a:t>06/11/2025</a:t>
             </a:fld>
             <a:endParaRPr lang="en-GB"/>
           </a:p>
@@ -4436,7 +3035,7 @@
           <a:p>
             <a:fld id="{846CE7D5-CF57-46EF-B807-FDD0502418D4}" type="datetimeFigureOut">
               <a:rPr lang="en-GB" smtClean="0"/>
-              <a:t>30/08/2025</a:t>
+              <a:t>06/11/2025</a:t>
             </a:fld>
             <a:endParaRPr lang="en-GB"/>
           </a:p>
@@ -7071,7 +5670,7 @@
                 <a:latin typeface="Arial" panose="020B0604020202020204" pitchFamily="34" charset="0"/>
                 <a:cs typeface="Arial" panose="020B0604020202020204" pitchFamily="34" charset="0"/>
               </a:rPr>
-              <a:t>We will use RStudio as the IDE to interact  with R</a:t>
+              <a:t>We will use Positron as the IDE to interact  with R</a:t>
             </a:r>
           </a:p>
         </p:txBody>
@@ -10086,10 +8685,10 @@
       </p:pic>
       <p:pic>
         <p:nvPicPr>
-          <p:cNvPr id="9" name="Picture 8" descr="A logo with a blue circle and a blue circle&#10;&#10;AI-generated content may be incorrect.">
+          <p:cNvPr id="21" name="Picture 20" descr="A blue and grey logo&#10;&#10;AI-generated content may be incorrect.">
             <a:extLst>
               <a:ext uri="{FF2B5EF4-FFF2-40B4-BE49-F238E27FC236}">
-                <a16:creationId xmlns:a16="http://schemas.microsoft.com/office/drawing/2014/main" id="{96B7E7CF-8B07-A18A-4BA8-EFE88E7368B5}"/>
+                <a16:creationId xmlns:a16="http://schemas.microsoft.com/office/drawing/2014/main" id="{D1E95A78-6C5B-D428-4180-08ADCAFE130F}"/>
               </a:ext>
             </a:extLst>
           </p:cNvPr>
@@ -10112,44 +8711,8 @@
         </p:blipFill>
         <p:spPr>
           <a:xfrm>
-            <a:off x="10023178" y="73034"/>
-            <a:ext cx="2430503" cy="853496"/>
-          </a:xfrm>
-          <a:prstGeom prst="rect">
-            <a:avLst/>
-          </a:prstGeom>
-        </p:spPr>
-      </p:pic>
-      <p:pic>
-        <p:nvPicPr>
-          <p:cNvPr id="21" name="Picture 20" descr="A blue and grey logo&#10;&#10;AI-generated content may be incorrect.">
-            <a:extLst>
-              <a:ext uri="{FF2B5EF4-FFF2-40B4-BE49-F238E27FC236}">
-                <a16:creationId xmlns:a16="http://schemas.microsoft.com/office/drawing/2014/main" id="{D1E95A78-6C5B-D428-4180-08ADCAFE130F}"/>
-              </a:ext>
-            </a:extLst>
-          </p:cNvPr>
-          <p:cNvPicPr>
-            <a:picLocks noChangeAspect="1"/>
-          </p:cNvPicPr>
-          <p:nvPr/>
-        </p:nvPicPr>
-        <p:blipFill>
-          <a:blip r:embed="rId17">
-            <a:extLst>
-              <a:ext uri="{28A0092B-C50C-407E-A947-70E740481C1C}">
-                <a14:useLocalDpi xmlns:a14="http://schemas.microsoft.com/office/drawing/2010/main" val="0"/>
-              </a:ext>
-            </a:extLst>
-          </a:blip>
-          <a:stretch>
-            <a:fillRect/>
-          </a:stretch>
-        </p:blipFill>
-        <p:spPr>
-          <a:xfrm>
-            <a:off x="11652934" y="944552"/>
-            <a:ext cx="810863" cy="628419"/>
+            <a:off x="10186202" y="88880"/>
+            <a:ext cx="1125598" cy="872339"/>
           </a:xfrm>
           <a:prstGeom prst="rect">
             <a:avLst/>
@@ -10159,7 +8722,7 @@
       <p:sp>
         <p:nvSpPr>
           <p:cNvPr id="4" name="Rectangle: Rounded Corners 3">
-            <a:hlinkClick r:id="rId18"/>
+            <a:hlinkClick r:id="rId17"/>
             <a:extLst>
               <a:ext uri="{FF2B5EF4-FFF2-40B4-BE49-F238E27FC236}">
                 <a16:creationId xmlns:a16="http://schemas.microsoft.com/office/drawing/2014/main" id="{1C59D9BA-21AA-E8EB-F940-86046CC7181D}"/>
@@ -10643,6 +9206,42 @@
           </a:fontRef>
         </p:style>
       </p:cxnSp>
+      <p:pic>
+        <p:nvPicPr>
+          <p:cNvPr id="16" name="Picture 15" descr="A blue and white logo&#10;&#10;AI-generated content may be incorrect.">
+            <a:extLst>
+              <a:ext uri="{FF2B5EF4-FFF2-40B4-BE49-F238E27FC236}">
+                <a16:creationId xmlns:a16="http://schemas.microsoft.com/office/drawing/2014/main" id="{2D15FD57-5CD9-F935-77FF-48ADCE960190}"/>
+              </a:ext>
+            </a:extLst>
+          </p:cNvPr>
+          <p:cNvPicPr>
+            <a:picLocks noChangeAspect="1"/>
+          </p:cNvPicPr>
+          <p:nvPr/>
+        </p:nvPicPr>
+        <p:blipFill>
+          <a:blip r:embed="rId18">
+            <a:extLst>
+              <a:ext uri="{28A0092B-C50C-407E-A947-70E740481C1C}">
+                <a14:useLocalDpi xmlns:a14="http://schemas.microsoft.com/office/drawing/2010/main" val="0"/>
+              </a:ext>
+            </a:extLst>
+          </a:blip>
+          <a:stretch>
+            <a:fillRect/>
+          </a:stretch>
+        </p:blipFill>
+        <p:spPr>
+          <a:xfrm>
+            <a:off x="11156238" y="-51588"/>
+            <a:ext cx="1747683" cy="1165122"/>
+          </a:xfrm>
+          <a:prstGeom prst="rect">
+            <a:avLst/>
+          </a:prstGeom>
+        </p:spPr>
+      </p:pic>
     </p:spTree>
     <p:extLst>
       <p:ext uri="{BB962C8B-B14F-4D97-AF65-F5344CB8AC3E}">
